--- a/downloads/DCT_V2_Ch12_Slides.pptx
+++ b/downloads/DCT_V2_Ch12_Slides.pptx
@@ -28,9 +28,10 @@
     <p:sldId id="276" r:id="rId22"/>
     <p:sldId id="277" r:id="rId23"/>
     <p:sldId id="278" r:id="rId24"/>
+    <p:sldId id="279" r:id="rId25"/>
   </p:sldIdLst>
   <p:notesMasterIdLst>
-    <p:notesMasterId r:id="rId25"/>
+    <p:notesMasterId r:id="rId26"/>
   </p:notesMasterIdLst>
   <p:sldSz cx="12192000" cy="6858000"/>
   <p:notesSz cx="6858000" cy="12192000"/>
@@ -129,7 +130,7 @@
   <p:extLst>
     <p:ext uri="{521415D9-36F7-43E2-AB2F-B90AF26B5E84}">
       <p14:sectionLst xmlns:p14="http://schemas.microsoft.com/office/powerpoint/2010/main">
-        <p14:section name="Opening" id="{3ade7682-f70e-4544-71a3-ef6fd6804aef}">
+        <p14:section name="Opening" id="{bde6b697-36c8-87a0-63a8-9b12f8cc6345}">
           <p14:sldIdLst>
             <p14:sldId id="256"/>
             <p14:sldId id="257"/>
@@ -137,36 +138,36 @@
             <p14:sldId id="259"/>
           </p14:sldIdLst>
         </p14:section>
-        <p14:section name="12.1 One Program, Several Owners" id="{ccb4c02a-722d-bff1-5330-ac5af5fde43b}">
+        <p14:section name="12.1 One Program, Several Owners" id="{d4ac67cc-1d25-111f-ecb4-311aa15f61ca}">
           <p14:sldIdLst>
             <p14:sldId id="260"/>
             <p14:sldId id="261"/>
           </p14:sldIdLst>
         </p14:section>
-        <p14:section name="12.2 Prices on a Frontier" id="{8e8857e3-73b4-6b91-e1ce-0e86aafed85d}">
+        <p14:section name="12.2 Prices on a Frontier" id="{85395d8e-910d-f1f4-da0d-ad17223dc7c2}">
           <p14:sldIdLst>
             <p14:sldId id="262"/>
             <p14:sldId id="263"/>
           </p14:sldIdLst>
         </p14:section>
-        <p14:section name="12.3 Choosing on the Frontier" id="{8c1bf4a7-44d2-fc6a-3037-64083bc095ac}">
+        <p14:section name="12.3 Choosing on the Frontier" id="{a74d22b4-701c-6724-7656-5da168cd6b4d}">
           <p14:sldIdLst>
             <p14:sldId id="264"/>
             <p14:sldId id="265"/>
           </p14:sldIdLst>
         </p14:section>
-        <p14:section name="12.4 Computing Frontiers" id="{62909db2-7665-12d6-225c-d7fac9b4c658}">
+        <p14:section name="12.4 Computing Frontiers" id="{a1e0fec6-8f78-f633-0f53-9998f3a11092}">
           <p14:sldIdLst>
             <p14:sldId id="266"/>
             <p14:sldId id="267"/>
           </p14:sldIdLst>
         </p14:section>
-        <p14:section name="12.5 Frontiers under Uncertainty" id="{eaaa9493-94e8-e503-3c98-3a812fee1745}">
+        <p14:section name="12.5 Frontiers under Uncertainty" id="{0749ac07-570f-5ead-28a0-d9c22708e2a9}">
           <p14:sldIdLst>
             <p14:sldId id="268"/>
           </p14:sldIdLst>
         </p14:section>
-        <p14:section name="Worked Example 12.1" id="{529ce09d-7bc5-25c0-263a-b66941fae433}">
+        <p14:section name="Worked Example 12.1" id="{441666ac-611a-c6af-8d2a-b87eeaf20200}">
           <p14:sldIdLst>
             <p14:sldId id="269"/>
             <p14:sldId id="270"/>
@@ -176,16 +177,21 @@
             <p14:sldId id="274"/>
           </p14:sldIdLst>
         </p14:section>
-        <p14:section name="AXIOM Lab 2.12" id="{f6b0ebdc-1fdb-411d-195c-b3f88177b126}">
+        <p14:section name="In Practice" id="{a667a900-96a3-65d7-5e33-0f7b03653ed0}">
           <p14:sldIdLst>
             <p14:sldId id="275"/>
           </p14:sldIdLst>
         </p14:section>
-        <p14:section name="Close" id="{cf836428-c036-b3fd-fb5d-ddb04169d18c}">
+        <p14:section name="AXIOM Lab 2.12" id="{8036e37b-2031-a983-f63a-4fc1f60fd1f7}">
           <p14:sldIdLst>
             <p14:sldId id="276"/>
+          </p14:sldIdLst>
+        </p14:section>
+        <p14:section name="Close" id="{82eda905-35b8-8089-450c-6aabe52ed64a}">
+          <p14:sldIdLst>
             <p14:sldId id="277"/>
             <p14:sldId id="278"/>
+            <p14:sldId id="279"/>
           </p14:sldIdLst>
         </p14:section>
       </p14:sectionLst>
@@ -1989,7 +1995,7 @@
           <a:p>
             <a:r>
               <a:rPr lang="en-US" dirty="0"/>
-              <a:t>AXIOM Lab 2.12. What to look for: dominated plans that nobody should propose; prices that decide between neighbouring plans; a reserve that costs $0.909 a dollar until a round moves; plans in dents that only aspirations reach; and goals that leave money on the table.</a:t>
+              <a:t>In Practice, Chapter 12: Dutch Railways Weigh More Trains Against Punctuality. A real organization's decision of this chapter's kind, told from its published record; every figure is cited in the book. The lesson for Meridian: Weights are declarations, and the choice keeps moving: the board later traded robustness for northern travel times. Sources: Kroon et al. (2009), Interfaces; Fioole et al. (2006), EJOR; Abbink et al. (2005); Horner (2008).</a:t>
             </a:r>
             <a:endParaRPr lang="en-US" dirty="0"/>
           </a:p>
@@ -2077,7 +2083,7 @@
           <a:p>
             <a:r>
               <a:rPr lang="en-US" dirty="0"/>
-              <a:t>Key Takeaways, Chapter 12.</a:t>
+              <a:t>AXIOM Lab 2.12. What to look for: dominated plans that nobody should propose; prices that decide between neighbouring plans; a reserve that costs $0.909 a dollar until a round moves; plans in dents that only aspirations reach; and goals that leave money on the table.</a:t>
             </a:r>
             <a:endParaRPr lang="en-US" dirty="0"/>
           </a:p>
@@ -2165,7 +2171,7 @@
           <a:p>
             <a:r>
               <a:rPr lang="en-US" dirty="0"/>
-              <a:t>The notebook and workbook are on the course website, www.dynamiccorporatetransformation.com.</a:t>
+              <a:t>Key Takeaways, Chapter 12.</a:t>
             </a:r>
             <a:endParaRPr lang="en-US" dirty="0"/>
           </a:p>
@@ -2253,7 +2259,7 @@
           <a:p>
             <a:r>
               <a:rPr lang="en-US" dirty="0"/>
-              <a:t>Chapter 13 continues Part IV, Multi-Objective and Intelligent Enterprise Optimization: predictive models learned from the enterprise's data by regularized empirical risk minimization, and their place inside the optimization.</a:t>
+              <a:t>The notebook and workbook are on the course website, www.dynamiccorporatetransformation.com.</a:t>
             </a:r>
             <a:endParaRPr lang="en-US" dirty="0"/>
           </a:p>
@@ -2277,6 +2283,94 @@
             <a:fld id="{F7021451-1387-4CA6-816F-3879F97B5CBC}" type="slidenum">
               <a:rPr lang="en-US"/>
               <a:t>23</a:t>
+            </a:fld>
+            <a:endParaRPr lang="en-US"/>
+          </a:p>
+        </p:txBody>
+      </p:sp>
+    </p:spTree>
+    <p:extLst>
+      <p:ext uri="{BB962C8B-B14F-4D97-AF65-F5344CB8AC3E}">
+        <p14:creationId xmlns:p14="http://schemas.microsoft.com/office/powerpoint/2010/main" val="1024086991"/>
+      </p:ext>
+    </p:extLst>
+  </p:cSld>
+  <p:clrMapOvr>
+    <a:masterClrMapping/>
+  </p:clrMapOvr>
+</p:notes>
+</file>
+
+<file path=ppt/notesSlides/notesSlide24.xml><?xml version="1.0" encoding="utf-8"?>
+<p:notes xmlns:a="http://schemas.openxmlformats.org/drawingml/2006/main" xmlns:r="http://schemas.openxmlformats.org/officeDocument/2006/relationships" xmlns:p="http://schemas.openxmlformats.org/presentationml/2006/main">
+  <p:cSld>
+    <p:spTree>
+      <p:nvGrpSpPr>
+        <p:cNvPr id="1" name=""/>
+        <p:cNvGrpSpPr/>
+        <p:nvPr/>
+      </p:nvGrpSpPr>
+      <p:grpSpPr>
+        <a:xfrm>
+          <a:off x="0" y="0"/>
+          <a:ext cx="0" cy="0"/>
+          <a:chOff x="0" y="0"/>
+          <a:chExt cx="0" cy="0"/>
+        </a:xfrm>
+      </p:grpSpPr>
+      <p:sp>
+        <p:nvSpPr>
+          <p:cNvPr id="2" name="Slide Image Placeholder 1"/>
+          <p:cNvSpPr>
+            <a:spLocks noGrp="1" noRot="1" noChangeAspect="1"/>
+          </p:cNvSpPr>
+          <p:nvPr>
+            <p:ph type="sldImg"/>
+          </p:nvPr>
+        </p:nvSpPr>
+        <p:spPr/>
+      </p:sp>
+      <p:sp>
+        <p:nvSpPr>
+          <p:cNvPr id="3" name="Notes Placeholder 2"/>
+          <p:cNvSpPr>
+            <a:spLocks noGrp="1"/>
+          </p:cNvSpPr>
+          <p:nvPr>
+            <p:ph type="body" idx="1"/>
+          </p:nvPr>
+        </p:nvSpPr>
+        <p:spPr/>
+        <p:txBody>
+          <a:bodyPr/>
+          <a:lstStyle/>
+          <a:p>
+            <a:r>
+              <a:rPr lang="en-US" dirty="0"/>
+              <a:t>Chapter 13 continues Part IV, Multi-Objective and Intelligent Enterprise Optimization: predictive models learned from the enterprise's data by regularized empirical risk minimization, and their place inside the optimization.</a:t>
+            </a:r>
+            <a:endParaRPr lang="en-US" dirty="0"/>
+          </a:p>
+        </p:txBody>
+      </p:sp>
+      <p:sp>
+        <p:nvSpPr>
+          <p:cNvPr id="4" name="Slide Number Placeholder 3"/>
+          <p:cNvSpPr>
+            <a:spLocks noGrp="1"/>
+          </p:cNvSpPr>
+          <p:nvPr>
+            <p:ph type="sldNum" sz="quarter" idx="10"/>
+          </p:nvPr>
+        </p:nvSpPr>
+        <p:spPr/>
+        <p:txBody>
+          <a:bodyPr/>
+          <a:lstStyle/>
+          <a:p>
+            <a:fld id="{F7021451-1387-4CA6-816F-3879F97B5CBC}" type="slidenum">
+              <a:rPr lang="en-US"/>
+              <a:t>24</a:t>
             </a:fld>
             <a:endParaRPr lang="en-US"/>
           </a:p>
@@ -14629,7 +14723,7 @@
                   <a:schemeClr val="accent1"/>
                 </a:solidFill>
               </a:rPr>
-              <a:t>AXIOM LAB 2.12 · MODULE AXIOM-12</a:t>
+              <a:t>IN PRACTICE · NETHERLANDS RAILWAYS</a:t>
             </a:r>
             <a:endParaRPr lang="en-US" sz="1200" dirty="0"/>
           </a:p>
@@ -14670,804 +14764,26 @@
                 <a:ea typeface="Cambria" pitchFamily="34" charset="-122"/>
                 <a:cs typeface="Cambria" pitchFamily="34" charset="-120"/>
               </a:rPr>
-              <a:t>Payouts, savings and the reserve, in AXIOM</a:t>
+              <a:t>Dutch railways weigh trains and punctuality</a:t>
             </a:r>
             <a:endParaRPr lang="en-US" sz="3200" dirty="0"/>
           </a:p>
         </p:txBody>
       </p:sp>
-      <p:pic>
-        <p:nvPicPr>
-          <p:cNvPr id="5" name="AXIOM logo" descr="AXIOM">    </p:cNvPr>
-          <p:cNvPicPr>
-            <a:picLocks noChangeAspect="1"/>
-          </p:cNvPicPr>
-          <p:nvPr/>
-        </p:nvPicPr>
-        <p:blipFill>
-          <a:blip r:embed="rId1"/>
-          <a:stretch>
-            <a:fillRect/>
-          </a:stretch>
-        </p:blipFill>
-        <p:spPr>
-          <a:xfrm>
-            <a:off x="9539935" y="310896"/>
-            <a:ext cx="2103120" cy="420624"/>
-          </a:xfrm>
-          <a:prstGeom prst="rect">
-            <a:avLst/>
-          </a:prstGeom>
-        </p:spPr>
-      </p:pic>
-      <p:sp>
-        <p:nvSpPr>
-          <p:cNvPr id="6" name="Situation"/>
-          <p:cNvSpPr txBox="1"/>
-          <p:nvPr/>
-        </p:nvSpPr>
-        <p:spPr>
-          <a:xfrm>
-            <a:off x="548640" y="1645920"/>
-            <a:ext cx="11094415" cy="777240"/>
-          </a:xfrm>
-          <a:prstGeom prst="rect">
-            <a:avLst/>
-          </a:prstGeom>
-          <a:noFill/>
-          <a:ln/>
-        </p:spPr>
-        <p:txBody>
-          <a:bodyPr wrap="square" lIns="0" tIns="0" rIns="0" bIns="0" rtlCol="0" anchor="t"/>
-          <a:lstStyle/>
-          <a:p>
-            <a:pPr indent="0" marL="0">
-              <a:buNone/>
-            </a:pPr>
-            <a:r>
-              <a:rPr lang="en-US" sz="1500" dirty="0">
-                <a:solidFill>
-                  <a:schemeClr val="tx1"/>
-                </a:solidFill>
-              </a:rPr>
-              <a:t>The board will not adopt a single measure until it has seen what each owner gives up. Open AXIOM, choose Lab 2.12 and load the Meridian automation instance: Chapter 5's program and the three owners' objectives.</a:t>
-            </a:r>
-            <a:endParaRPr lang="en-US" sz="1500" dirty="0"/>
-          </a:p>
-        </p:txBody>
-      </p:sp>
-      <p:sp>
-        <p:nvSpPr>
-          <p:cNvPr id="7" name="Flow line"/>
+      <p:sp>
+        <p:nvSpPr>
+          <p:cNvPr id="5" name="Card"/>
           <p:cNvSpPr/>
           <p:nvPr/>
         </p:nvSpPr>
         <p:spPr>
           <a:xfrm>
-            <a:off x="1658082" y="2880360"/>
-            <a:ext cx="8875532" cy="0"/>
-          </a:xfrm>
-          <a:prstGeom prst="line">
-            <a:avLst/>
-          </a:prstGeom>
-          <a:noFill/>
-          <a:ln w="25400">
-            <a:solidFill>
-              <a:srgbClr val="C4CBD8"/>
-            </a:solidFill>
-            <a:prstDash val="solid"/>
-          </a:ln>
-        </p:spPr>
-      </p:sp>
-      <p:sp>
-        <p:nvSpPr>
-          <p:cNvPr id="8" name="Number"/>
-          <p:cNvSpPr/>
-          <p:nvPr/>
-        </p:nvSpPr>
-        <p:spPr>
-          <a:xfrm>
-            <a:off x="1383762" y="2606040"/>
-            <a:ext cx="548640" cy="548640"/>
-          </a:xfrm>
-          <a:prstGeom prst="ellipse">
-            <a:avLst/>
-          </a:prstGeom>
-          <a:solidFill>
-            <a:schemeClr val="accent1"/>
-          </a:solidFill>
-          <a:ln w="6350">
-            <a:solidFill>
-              <a:schemeClr val="accent1"/>
-            </a:solidFill>
-            <a:prstDash val="solid"/>
-          </a:ln>
-        </p:spPr>
-      </p:sp>
-      <p:sp>
-        <p:nvSpPr>
-          <p:cNvPr id="9" name="Text 5"/>
-          <p:cNvSpPr txBox="1"/>
-          <p:nvPr/>
-        </p:nvSpPr>
-        <p:spPr>
-          <a:xfrm>
-            <a:off x="1383762" y="2606040"/>
-            <a:ext cx="548640" cy="548640"/>
-          </a:xfrm>
-          <a:prstGeom prst="rect">
-            <a:avLst/>
-          </a:prstGeom>
-          <a:noFill/>
-          <a:ln/>
-        </p:spPr>
-        <p:txBody>
-          <a:bodyPr wrap="square" lIns="0" tIns="0" rIns="0" bIns="0" rtlCol="0" anchor="ctr"/>
-          <a:lstStyle/>
-          <a:p>
-            <a:pPr algn="ctr" indent="0" marL="0">
-              <a:buNone/>
-            </a:pPr>
-            <a:r>
-              <a:rPr lang="en-US" sz="1600" b="1" dirty="0">
-                <a:solidFill>
-                  <a:schemeClr val="bg1"/>
-                </a:solidFill>
-                <a:latin typeface="Calibri" pitchFamily="34" charset="0"/>
-                <a:ea typeface="Calibri" pitchFamily="34" charset="-122"/>
-                <a:cs typeface="Calibri" pitchFamily="34" charset="-120"/>
-              </a:rPr>
-              <a:t>1</a:t>
-            </a:r>
-            <a:endParaRPr lang="en-US" sz="1600" dirty="0"/>
-          </a:p>
-        </p:txBody>
-      </p:sp>
-      <p:sp>
-        <p:nvSpPr>
-          <p:cNvPr id="10" name="Flow head"/>
-          <p:cNvSpPr txBox="1"/>
-          <p:nvPr/>
-        </p:nvSpPr>
-        <p:spPr>
-          <a:xfrm>
-            <a:off x="621792" y="3291840"/>
-            <a:ext cx="2072579" cy="548640"/>
-          </a:xfrm>
-          <a:prstGeom prst="rect">
-            <a:avLst/>
-          </a:prstGeom>
-          <a:noFill/>
-          <a:ln/>
-        </p:spPr>
-        <p:txBody>
-          <a:bodyPr wrap="square" lIns="0" tIns="0" rIns="0" bIns="0" rtlCol="0" anchor="t"/>
-          <a:lstStyle/>
-          <a:p>
-            <a:pPr algn="ctr" indent="0" marL="0">
-              <a:buNone/>
-            </a:pPr>
-            <a:r>
-              <a:rPr lang="en-US" sz="1600" b="1" dirty="0">
-                <a:solidFill>
-                  <a:schemeClr val="tx1"/>
-                </a:solidFill>
-                <a:latin typeface="Cambria" pitchFamily="34" charset="0"/>
-                <a:ea typeface="Cambria" pitchFamily="34" charset="-122"/>
-                <a:cs typeface="Cambria" pitchFamily="34" charset="-120"/>
-              </a:rPr>
-              <a:t>Enumerate</a:t>
-            </a:r>
-            <a:endParaRPr lang="en-US" sz="1600" dirty="0"/>
-          </a:p>
-        </p:txBody>
-      </p:sp>
-      <p:sp>
-        <p:nvSpPr>
-          <p:cNvPr id="11" name="Flow text"/>
-          <p:cNvSpPr txBox="1"/>
-          <p:nvPr/>
-        </p:nvSpPr>
-        <p:spPr>
-          <a:xfrm>
-            <a:off x="640080" y="3867912"/>
-            <a:ext cx="2036003" cy="1554480"/>
-          </a:xfrm>
-          <a:prstGeom prst="rect">
-            <a:avLst/>
-          </a:prstGeom>
-          <a:noFill/>
-          <a:ln/>
-        </p:spPr>
-        <p:txBody>
-          <a:bodyPr wrap="square" lIns="0" tIns="0" rIns="0" bIns="0" rtlCol="0" anchor="t"/>
-          <a:lstStyle/>
-          <a:p>
-            <a:pPr algn="ctr" indent="0" marL="0">
-              <a:buNone/>
-            </a:pPr>
-            <a:r>
-              <a:rPr lang="en-US" sz="1400" dirty="0">
-                <a:solidFill>
-                  <a:schemeClr val="tx2"/>
-                </a:solidFill>
-              </a:rPr>
-              <a:t>Solve the payouts for every schedule; plot payouts against savings; mark the dominated.</a:t>
-            </a:r>
-            <a:endParaRPr lang="en-US" sz="1400" dirty="0"/>
-          </a:p>
-        </p:txBody>
-      </p:sp>
-      <p:sp>
-        <p:nvSpPr>
-          <p:cNvPr id="12" name="Number"/>
-          <p:cNvSpPr/>
-          <p:nvPr/>
-        </p:nvSpPr>
-        <p:spPr>
-          <a:xfrm>
-            <a:off x="3602645" y="2606040"/>
-            <a:ext cx="548640" cy="548640"/>
-          </a:xfrm>
-          <a:prstGeom prst="ellipse">
-            <a:avLst/>
-          </a:prstGeom>
-          <a:solidFill>
-            <a:schemeClr val="accent1"/>
-          </a:solidFill>
-          <a:ln w="6350">
-            <a:solidFill>
-              <a:schemeClr val="accent1"/>
-            </a:solidFill>
-            <a:prstDash val="solid"/>
-          </a:ln>
-        </p:spPr>
-      </p:sp>
-      <p:sp>
-        <p:nvSpPr>
-          <p:cNvPr id="13" name="Text 9"/>
-          <p:cNvSpPr txBox="1"/>
-          <p:nvPr/>
-        </p:nvSpPr>
-        <p:spPr>
-          <a:xfrm>
-            <a:off x="3602645" y="2606040"/>
-            <a:ext cx="548640" cy="548640"/>
-          </a:xfrm>
-          <a:prstGeom prst="rect">
-            <a:avLst/>
-          </a:prstGeom>
-          <a:noFill/>
-          <a:ln/>
-        </p:spPr>
-        <p:txBody>
-          <a:bodyPr wrap="square" lIns="0" tIns="0" rIns="0" bIns="0" rtlCol="0" anchor="ctr"/>
-          <a:lstStyle/>
-          <a:p>
-            <a:pPr algn="ctr" indent="0" marL="0">
-              <a:buNone/>
-            </a:pPr>
-            <a:r>
-              <a:rPr lang="en-US" sz="1600" b="1" dirty="0">
-                <a:solidFill>
-                  <a:schemeClr val="bg1"/>
-                </a:solidFill>
-                <a:latin typeface="Calibri" pitchFamily="34" charset="0"/>
-                <a:ea typeface="Calibri" pitchFamily="34" charset="-122"/>
-                <a:cs typeface="Calibri" pitchFamily="34" charset="-120"/>
-              </a:rPr>
-              <a:t>2</a:t>
-            </a:r>
-            <a:endParaRPr lang="en-US" sz="1600" dirty="0"/>
-          </a:p>
-        </p:txBody>
-      </p:sp>
-      <p:sp>
-        <p:nvSpPr>
-          <p:cNvPr id="14" name="Flow head"/>
-          <p:cNvSpPr txBox="1"/>
-          <p:nvPr/>
-        </p:nvSpPr>
-        <p:spPr>
-          <a:xfrm>
-            <a:off x="2840675" y="3291840"/>
-            <a:ext cx="2072579" cy="548640"/>
-          </a:xfrm>
-          <a:prstGeom prst="rect">
-            <a:avLst/>
-          </a:prstGeom>
-          <a:noFill/>
-          <a:ln/>
-        </p:spPr>
-        <p:txBody>
-          <a:bodyPr wrap="square" lIns="0" tIns="0" rIns="0" bIns="0" rtlCol="0" anchor="t"/>
-          <a:lstStyle/>
-          <a:p>
-            <a:pPr algn="ctr" indent="0" marL="0">
-              <a:buNone/>
-            </a:pPr>
-            <a:r>
-              <a:rPr lang="en-US" sz="1600" b="1" dirty="0">
-                <a:solidFill>
-                  <a:schemeClr val="tx1"/>
-                </a:solidFill>
-                <a:latin typeface="Cambria" pitchFamily="34" charset="0"/>
-                <a:ea typeface="Cambria" pitchFamily="34" charset="-122"/>
-                <a:cs typeface="Cambria" pitchFamily="34" charset="-120"/>
-              </a:rPr>
-              <a:t>Price the frontier</a:t>
-            </a:r>
-            <a:endParaRPr lang="en-US" sz="1600" dirty="0"/>
-          </a:p>
-        </p:txBody>
-      </p:sp>
-      <p:sp>
-        <p:nvSpPr>
-          <p:cNvPr id="15" name="Flow text"/>
-          <p:cNvSpPr txBox="1"/>
-          <p:nvPr/>
-        </p:nvSpPr>
-        <p:spPr>
-          <a:xfrm>
-            <a:off x="2858963" y="3867912"/>
-            <a:ext cx="2036003" cy="1554480"/>
-          </a:xfrm>
-          <a:prstGeom prst="rect">
-            <a:avLst/>
-          </a:prstGeom>
-          <a:noFill/>
-          <a:ln/>
-        </p:spPr>
-        <p:txBody>
-          <a:bodyPr wrap="square" lIns="0" tIns="0" rIns="0" bIns="0" rtlCol="0" anchor="t"/>
-          <a:lstStyle/>
-          <a:p>
-            <a:pPr algn="ctr" indent="0" marL="0">
-              <a:buNone/>
-            </a:pPr>
-            <a:r>
-              <a:rPr lang="en-US" sz="1400" dirty="0">
-                <a:solidFill>
-                  <a:schemeClr val="tx2"/>
-                </a:solidFill>
-              </a:rPr>
-              <a:t>The price between neighbouring efficient plans, and the prices each wins.</a:t>
-            </a:r>
-            <a:endParaRPr lang="en-US" sz="1400" dirty="0"/>
-          </a:p>
-        </p:txBody>
-      </p:sp>
-      <p:sp>
-        <p:nvSpPr>
-          <p:cNvPr id="16" name="Number"/>
-          <p:cNvSpPr/>
-          <p:nvPr/>
-        </p:nvSpPr>
-        <p:spPr>
-          <a:xfrm>
-            <a:off x="5821528" y="2606040"/>
-            <a:ext cx="548640" cy="548640"/>
-          </a:xfrm>
-          <a:prstGeom prst="ellipse">
-            <a:avLst/>
-          </a:prstGeom>
-          <a:solidFill>
-            <a:schemeClr val="accent1"/>
-          </a:solidFill>
-          <a:ln w="6350">
-            <a:solidFill>
-              <a:schemeClr val="accent1"/>
-            </a:solidFill>
-            <a:prstDash val="solid"/>
-          </a:ln>
-        </p:spPr>
-      </p:sp>
-      <p:sp>
-        <p:nvSpPr>
-          <p:cNvPr id="17" name="Text 13"/>
-          <p:cNvSpPr txBox="1"/>
-          <p:nvPr/>
-        </p:nvSpPr>
-        <p:spPr>
-          <a:xfrm>
-            <a:off x="5821528" y="2606040"/>
-            <a:ext cx="548640" cy="548640"/>
-          </a:xfrm>
-          <a:prstGeom prst="rect">
-            <a:avLst/>
-          </a:prstGeom>
-          <a:noFill/>
-          <a:ln/>
-        </p:spPr>
-        <p:txBody>
-          <a:bodyPr wrap="square" lIns="0" tIns="0" rIns="0" bIns="0" rtlCol="0" anchor="ctr"/>
-          <a:lstStyle/>
-          <a:p>
-            <a:pPr algn="ctr" indent="0" marL="0">
-              <a:buNone/>
-            </a:pPr>
-            <a:r>
-              <a:rPr lang="en-US" sz="1600" b="1" dirty="0">
-                <a:solidFill>
-                  <a:schemeClr val="bg1"/>
-                </a:solidFill>
-                <a:latin typeface="Calibri" pitchFamily="34" charset="0"/>
-                <a:ea typeface="Calibri" pitchFamily="34" charset="-122"/>
-                <a:cs typeface="Calibri" pitchFamily="34" charset="-120"/>
-              </a:rPr>
-              <a:t>3</a:t>
-            </a:r>
-            <a:endParaRPr lang="en-US" sz="1600" dirty="0"/>
-          </a:p>
-        </p:txBody>
-      </p:sp>
-      <p:sp>
-        <p:nvSpPr>
-          <p:cNvPr id="18" name="Flow head"/>
-          <p:cNvSpPr txBox="1"/>
-          <p:nvPr/>
-        </p:nvSpPr>
-        <p:spPr>
-          <a:xfrm>
-            <a:off x="5059558" y="3291840"/>
-            <a:ext cx="2072579" cy="548640"/>
-          </a:xfrm>
-          <a:prstGeom prst="rect">
-            <a:avLst/>
-          </a:prstGeom>
-          <a:noFill/>
-          <a:ln/>
-        </p:spPr>
-        <p:txBody>
-          <a:bodyPr wrap="square" lIns="0" tIns="0" rIns="0" bIns="0" rtlCol="0" anchor="t"/>
-          <a:lstStyle/>
-          <a:p>
-            <a:pPr algn="ctr" indent="0" marL="0">
-              <a:buNone/>
-            </a:pPr>
-            <a:r>
-              <a:rPr lang="en-US" sz="1600" b="1" dirty="0">
-                <a:solidFill>
-                  <a:schemeClr val="tx1"/>
-                </a:solidFill>
-                <a:latin typeface="Cambria" pitchFamily="34" charset="0"/>
-                <a:ea typeface="Cambria" pitchFamily="34" charset="-122"/>
-                <a:cs typeface="Cambria" pitchFamily="34" charset="-120"/>
-              </a:rPr>
-              <a:t>Bound the reserve</a:t>
-            </a:r>
-            <a:endParaRPr lang="en-US" sz="1600" dirty="0"/>
-          </a:p>
-        </p:txBody>
-      </p:sp>
-      <p:sp>
-        <p:nvSpPr>
-          <p:cNvPr id="19" name="Flow text"/>
-          <p:cNvSpPr txBox="1"/>
-          <p:nvPr/>
-        </p:nvSpPr>
-        <p:spPr>
-          <a:xfrm>
-            <a:off x="5077846" y="3867912"/>
-            <a:ext cx="2036003" cy="1554480"/>
-          </a:xfrm>
-          <a:prstGeom prst="rect">
-            <a:avLst/>
-          </a:prstGeom>
-          <a:noFill/>
-          <a:ln/>
-        </p:spPr>
-        <p:txBody>
-          <a:bodyPr wrap="square" lIns="0" tIns="0" rIns="0" bIns="0" rtlCol="0" anchor="t"/>
-          <a:lstStyle/>
-          <a:p>
-            <a:pPr algn="ctr" indent="0" marL="0">
-              <a:buNone/>
-            </a:pPr>
-            <a:r>
-              <a:rPr lang="en-US" sz="1400" dirty="0">
-                <a:solidFill>
-                  <a:schemeClr val="tx2"/>
-                </a:solidFill>
-              </a:rPr>
-              <a:t>Raise the reserve, read its multiplier, find where the rounds move.</a:t>
-            </a:r>
-            <a:endParaRPr lang="en-US" sz="1400" dirty="0"/>
-          </a:p>
-        </p:txBody>
-      </p:sp>
-      <p:sp>
-        <p:nvSpPr>
-          <p:cNvPr id="20" name="Number"/>
-          <p:cNvSpPr/>
-          <p:nvPr/>
-        </p:nvSpPr>
-        <p:spPr>
-          <a:xfrm>
-            <a:off x="8040411" y="2606040"/>
-            <a:ext cx="548640" cy="548640"/>
-          </a:xfrm>
-          <a:prstGeom prst="ellipse">
-            <a:avLst/>
-          </a:prstGeom>
-          <a:solidFill>
-            <a:schemeClr val="accent1"/>
-          </a:solidFill>
-          <a:ln w="6350">
-            <a:solidFill>
-              <a:schemeClr val="accent1"/>
-            </a:solidFill>
-            <a:prstDash val="solid"/>
-          </a:ln>
-        </p:spPr>
-      </p:sp>
-      <p:sp>
-        <p:nvSpPr>
-          <p:cNvPr id="21" name="Text 17"/>
-          <p:cNvSpPr txBox="1"/>
-          <p:nvPr/>
-        </p:nvSpPr>
-        <p:spPr>
-          <a:xfrm>
-            <a:off x="8040411" y="2606040"/>
-            <a:ext cx="548640" cy="548640"/>
-          </a:xfrm>
-          <a:prstGeom prst="rect">
-            <a:avLst/>
-          </a:prstGeom>
-          <a:noFill/>
-          <a:ln/>
-        </p:spPr>
-        <p:txBody>
-          <a:bodyPr wrap="square" lIns="0" tIns="0" rIns="0" bIns="0" rtlCol="0" anchor="ctr"/>
-          <a:lstStyle/>
-          <a:p>
-            <a:pPr algn="ctr" indent="0" marL="0">
-              <a:buNone/>
-            </a:pPr>
-            <a:r>
-              <a:rPr lang="en-US" sz="1600" b="1" dirty="0">
-                <a:solidFill>
-                  <a:schemeClr val="bg1"/>
-                </a:solidFill>
-                <a:latin typeface="Calibri" pitchFamily="34" charset="0"/>
-                <a:ea typeface="Calibri" pitchFamily="34" charset="-122"/>
-                <a:cs typeface="Calibri" pitchFamily="34" charset="-120"/>
-              </a:rPr>
-              <a:t>4</a:t>
-            </a:r>
-            <a:endParaRPr lang="en-US" sz="1600" dirty="0"/>
-          </a:p>
-        </p:txBody>
-      </p:sp>
-      <p:sp>
-        <p:nvSpPr>
-          <p:cNvPr id="22" name="Flow head"/>
-          <p:cNvSpPr txBox="1"/>
-          <p:nvPr/>
-        </p:nvSpPr>
-        <p:spPr>
-          <a:xfrm>
-            <a:off x="7278441" y="3291840"/>
-            <a:ext cx="2072579" cy="548640"/>
-          </a:xfrm>
-          <a:prstGeom prst="rect">
-            <a:avLst/>
-          </a:prstGeom>
-          <a:noFill/>
-          <a:ln/>
-        </p:spPr>
-        <p:txBody>
-          <a:bodyPr wrap="square" lIns="0" tIns="0" rIns="0" bIns="0" rtlCol="0" anchor="t"/>
-          <a:lstStyle/>
-          <a:p>
-            <a:pPr algn="ctr" indent="0" marL="0">
-              <a:buNone/>
-            </a:pPr>
-            <a:r>
-              <a:rPr lang="en-US" sz="1600" b="1" dirty="0">
-                <a:solidFill>
-                  <a:schemeClr val="tx1"/>
-                </a:solidFill>
-                <a:latin typeface="Cambria" pitchFamily="34" charset="0"/>
-                <a:ea typeface="Cambria" pitchFamily="34" charset="-122"/>
-                <a:cs typeface="Cambria" pitchFamily="34" charset="-120"/>
-              </a:rPr>
-              <a:t>Choose</a:t>
-            </a:r>
-            <a:endParaRPr lang="en-US" sz="1600" dirty="0"/>
-          </a:p>
-        </p:txBody>
-      </p:sp>
-      <p:sp>
-        <p:nvSpPr>
-          <p:cNvPr id="23" name="Flow text"/>
-          <p:cNvSpPr txBox="1"/>
-          <p:nvPr/>
-        </p:nvSpPr>
-        <p:spPr>
-          <a:xfrm>
-            <a:off x="7296729" y="3867912"/>
-            <a:ext cx="2036003" cy="1554480"/>
-          </a:xfrm>
-          <a:prstGeom prst="rect">
-            <a:avLst/>
-          </a:prstGeom>
-          <a:noFill/>
-          <a:ln/>
-        </p:spPr>
-        <p:txBody>
-          <a:bodyPr wrap="square" lIns="0" tIns="0" rIns="0" bIns="0" rtlCol="0" anchor="t"/>
-          <a:lstStyle/>
-          <a:p>
-            <a:pPr algn="ctr" indent="0" marL="0">
-              <a:buNone/>
-            </a:pPr>
-            <a:r>
-              <a:rPr lang="en-US" sz="1400" dirty="0">
-                <a:solidFill>
-                  <a:schemeClr val="tx2"/>
-                </a:solidFill>
-              </a:rPr>
-              <a:t>Aspirations and weights for a Chebyshev choice; goals with and without a second stage.</a:t>
-            </a:r>
-            <a:endParaRPr lang="en-US" sz="1400" dirty="0"/>
-          </a:p>
-        </p:txBody>
-      </p:sp>
-      <p:sp>
-        <p:nvSpPr>
-          <p:cNvPr id="24" name="Number"/>
-          <p:cNvSpPr/>
-          <p:nvPr/>
-        </p:nvSpPr>
-        <p:spPr>
-          <a:xfrm>
-            <a:off x="10259294" y="2606040"/>
-            <a:ext cx="548640" cy="548640"/>
-          </a:xfrm>
-          <a:prstGeom prst="ellipse">
-            <a:avLst/>
-          </a:prstGeom>
-          <a:solidFill>
-            <a:schemeClr val="accent1"/>
-          </a:solidFill>
-          <a:ln w="6350">
-            <a:solidFill>
-              <a:schemeClr val="accent1"/>
-            </a:solidFill>
-            <a:prstDash val="solid"/>
-          </a:ln>
-        </p:spPr>
-      </p:sp>
-      <p:sp>
-        <p:nvSpPr>
-          <p:cNvPr id="25" name="Text 21"/>
-          <p:cNvSpPr txBox="1"/>
-          <p:nvPr/>
-        </p:nvSpPr>
-        <p:spPr>
-          <a:xfrm>
-            <a:off x="10259294" y="2606040"/>
-            <a:ext cx="548640" cy="548640"/>
-          </a:xfrm>
-          <a:prstGeom prst="rect">
-            <a:avLst/>
-          </a:prstGeom>
-          <a:noFill/>
-          <a:ln/>
-        </p:spPr>
-        <p:txBody>
-          <a:bodyPr wrap="square" lIns="0" tIns="0" rIns="0" bIns="0" rtlCol="0" anchor="ctr"/>
-          <a:lstStyle/>
-          <a:p>
-            <a:pPr algn="ctr" indent="0" marL="0">
-              <a:buNone/>
-            </a:pPr>
-            <a:r>
-              <a:rPr lang="en-US" sz="1600" b="1" dirty="0">
-                <a:solidFill>
-                  <a:schemeClr val="bg1"/>
-                </a:solidFill>
-                <a:latin typeface="Calibri" pitchFamily="34" charset="0"/>
-                <a:ea typeface="Calibri" pitchFamily="34" charset="-122"/>
-                <a:cs typeface="Calibri" pitchFamily="34" charset="-120"/>
-              </a:rPr>
-              <a:t>5</a:t>
-            </a:r>
-            <a:endParaRPr lang="en-US" sz="1600" dirty="0"/>
-          </a:p>
-        </p:txBody>
-      </p:sp>
-      <p:sp>
-        <p:nvSpPr>
-          <p:cNvPr id="26" name="Flow head"/>
-          <p:cNvSpPr txBox="1"/>
-          <p:nvPr/>
-        </p:nvSpPr>
-        <p:spPr>
-          <a:xfrm>
-            <a:off x="9497324" y="3291840"/>
-            <a:ext cx="2072579" cy="548640"/>
-          </a:xfrm>
-          <a:prstGeom prst="rect">
-            <a:avLst/>
-          </a:prstGeom>
-          <a:noFill/>
-          <a:ln/>
-        </p:spPr>
-        <p:txBody>
-          <a:bodyPr wrap="square" lIns="0" tIns="0" rIns="0" bIns="0" rtlCol="0" anchor="t"/>
-          <a:lstStyle/>
-          <a:p>
-            <a:pPr algn="ctr" indent="0" marL="0">
-              <a:buNone/>
-            </a:pPr>
-            <a:r>
-              <a:rPr lang="en-US" sz="1600" b="1" dirty="0">
-                <a:solidFill>
-                  <a:schemeClr val="tx1"/>
-                </a:solidFill>
-                <a:latin typeface="Cambria" pitchFamily="34" charset="0"/>
-                <a:ea typeface="Cambria" pitchFamily="34" charset="-122"/>
-                <a:cs typeface="Cambria" pitchFamily="34" charset="-120"/>
-              </a:rPr>
-              <a:t>Add uncertainty</a:t>
-            </a:r>
-            <a:endParaRPr lang="en-US" sz="1600" dirty="0"/>
-          </a:p>
-        </p:txBody>
-      </p:sp>
-      <p:sp>
-        <p:nvSpPr>
-          <p:cNvPr id="27" name="Flow text"/>
-          <p:cNvSpPr txBox="1"/>
-          <p:nvPr/>
-        </p:nvSpPr>
-        <p:spPr>
-          <a:xfrm>
-            <a:off x="9515612" y="3867912"/>
-            <a:ext cx="2036003" cy="1554480"/>
-          </a:xfrm>
-          <a:prstGeom prst="rect">
-            <a:avLst/>
-          </a:prstGeom>
-          <a:noFill/>
-          <a:ln/>
-        </p:spPr>
-        <p:txBody>
-          <a:bodyPr wrap="square" lIns="0" tIns="0" rIns="0" bIns="0" rtlCol="0" anchor="t"/>
-          <a:lstStyle/>
-          <a:p>
-            <a:pPr algn="ctr" indent="0" marL="0">
-              <a:buNone/>
-            </a:pPr>
-            <a:r>
-              <a:rPr lang="en-US" sz="1400" dirty="0">
-                <a:solidFill>
-                  <a:schemeClr val="tx2"/>
-                </a:solidFill>
-              </a:rPr>
-              <a:t>Load Chapter 9's packages; read the price of the board's appetite.</a:t>
-            </a:r>
-            <a:endParaRPr lang="en-US" sz="1400" dirty="0"/>
-          </a:p>
-        </p:txBody>
-      </p:sp>
-      <p:sp>
-        <p:nvSpPr>
-          <p:cNvPr id="28" name="Deliverable card"/>
-          <p:cNvSpPr/>
-          <p:nvPr/>
-        </p:nvSpPr>
-        <p:spPr>
-          <a:xfrm>
-            <a:off x="548640" y="5486400"/>
-            <a:ext cx="11094415" cy="685800"/>
+            <a:off x="548640" y="1691640"/>
+            <a:ext cx="3515258" cy="2103120"/>
           </a:xfrm>
           <a:prstGeom prst="roundRect">
             <a:avLst>
-              <a:gd name="adj" fmla="val 10667"/>
+              <a:gd name="adj" fmla="val 3478"/>
             </a:avLst>
           </a:prstGeom>
           <a:solidFill>
@@ -15483,14 +14799,14 @@
       </p:sp>
       <p:sp>
         <p:nvSpPr>
-          <p:cNvPr id="29" name="Deliverable"/>
+          <p:cNvPr id="6" name="Card label"/>
           <p:cNvSpPr txBox="1"/>
           <p:nvPr/>
         </p:nvSpPr>
         <p:spPr>
           <a:xfrm>
-            <a:off x="777240" y="5559552"/>
-            <a:ext cx="10637215" cy="539496"/>
+            <a:off x="731520" y="1819656"/>
+            <a:ext cx="3149498" cy="310896"/>
           </a:xfrm>
           <a:prstGeom prst="rect">
             <a:avLst/>
@@ -15506,22 +14822,779 @@
               <a:buNone/>
             </a:pPr>
             <a:r>
-              <a:rPr lang="en-US" sz="1400" b="1" dirty="0">
+              <a:rPr lang="en-US" sz="1300" b="1" dirty="0">
+                <a:solidFill>
+                  <a:schemeClr val="accent1"/>
+                </a:solidFill>
+              </a:rPr>
+              <a:t>The decision</a:t>
+            </a:r>
+            <a:endParaRPr lang="en-US" sz="1300" dirty="0"/>
+          </a:p>
+        </p:txBody>
+      </p:sp>
+      <p:sp>
+        <p:nvSpPr>
+          <p:cNvPr id="7" name="Card head"/>
+          <p:cNvSpPr txBox="1"/>
+          <p:nvPr/>
+        </p:nvSpPr>
+        <p:spPr>
+          <a:xfrm>
+            <a:off x="731520" y="2148840"/>
+            <a:ext cx="3149498" cy="576072"/>
+          </a:xfrm>
+          <a:prstGeom prst="rect">
+            <a:avLst/>
+          </a:prstGeom>
+          <a:noFill/>
+          <a:ln/>
+        </p:spPr>
+        <p:txBody>
+          <a:bodyPr wrap="square" lIns="0" tIns="0" rIns="0" bIns="0" rtlCol="0" anchor="t"/>
+          <a:lstStyle/>
+          <a:p>
+            <a:pPr indent="0" marL="0">
+              <a:buNone/>
+            </a:pPr>
+            <a:r>
+              <a:rPr lang="en-US" sz="1600" b="1" dirty="0">
                 <a:solidFill>
                   <a:schemeClr val="tx1"/>
                 </a:solidFill>
-              </a:rPr>
-              <a:t>Deliverable:</a:t>
-            </a:r>
-            <a:r>
-              <a:rPr lang="en-US" sz="1400" dirty="0">
+                <a:latin typeface="Cambria" pitchFamily="34" charset="0"/>
+                <a:ea typeface="Cambria" pitchFamily="34" charset="-122"/>
+                <a:cs typeface="Cambria" pitchFamily="34" charset="-120"/>
+              </a:rPr>
+              <a:t>A new national timetable</a:t>
+            </a:r>
+            <a:endParaRPr lang="en-US" sz="1600" dirty="0"/>
+          </a:p>
+        </p:txBody>
+      </p:sp>
+      <p:sp>
+        <p:nvSpPr>
+          <p:cNvPr id="8" name="Card text"/>
+          <p:cNvSpPr txBox="1"/>
+          <p:nvPr/>
+        </p:nvSpPr>
+        <p:spPr>
+          <a:xfrm>
+            <a:off x="731520" y="2798064"/>
+            <a:ext cx="3149498" cy="868680"/>
+          </a:xfrm>
+          <a:prstGeom prst="rect">
+            <a:avLst/>
+          </a:prstGeom>
+          <a:noFill/>
+          <a:ln/>
+        </p:spPr>
+        <p:txBody>
+          <a:bodyPr wrap="square" lIns="0" tIns="0" rIns="0" bIns="0" rtlCol="0" anchor="t"/>
+          <a:lstStyle/>
+          <a:p>
+            <a:pPr indent="0" marL="0">
+              <a:buNone/>
+            </a:pPr>
+            <a:r>
+              <a:rPr lang="en-US" sz="1300" dirty="0">
+                <a:solidFill>
+                  <a:schemeClr val="tx2"/>
+                </a:solidFill>
+              </a:rPr>
+              <a:t>More trains on a heavily used network, and better punctuality: goals that conflict.</a:t>
+            </a:r>
+            <a:endParaRPr lang="en-US" sz="1300" dirty="0"/>
+          </a:p>
+        </p:txBody>
+      </p:sp>
+      <p:sp>
+        <p:nvSpPr>
+          <p:cNvPr id="9" name="Card"/>
+          <p:cNvSpPr/>
+          <p:nvPr/>
+        </p:nvSpPr>
+        <p:spPr>
+          <a:xfrm>
+            <a:off x="4338218" y="1691640"/>
+            <a:ext cx="3515258" cy="2103120"/>
+          </a:xfrm>
+          <a:prstGeom prst="roundRect">
+            <a:avLst>
+              <a:gd name="adj" fmla="val 3478"/>
+            </a:avLst>
+          </a:prstGeom>
+          <a:solidFill>
+            <a:schemeClr val="bg2"/>
+          </a:solidFill>
+          <a:ln w="9525">
+            <a:solidFill>
+              <a:srgbClr val="C4CBD8"/>
+            </a:solidFill>
+            <a:prstDash val="solid"/>
+          </a:ln>
+        </p:spPr>
+      </p:sp>
+      <p:sp>
+        <p:nvSpPr>
+          <p:cNvPr id="10" name="Card label"/>
+          <p:cNvSpPr txBox="1"/>
+          <p:nvPr/>
+        </p:nvSpPr>
+        <p:spPr>
+          <a:xfrm>
+            <a:off x="4521098" y="1819656"/>
+            <a:ext cx="3149498" cy="310896"/>
+          </a:xfrm>
+          <a:prstGeom prst="rect">
+            <a:avLst/>
+          </a:prstGeom>
+          <a:noFill/>
+          <a:ln/>
+        </p:spPr>
+        <p:txBody>
+          <a:bodyPr wrap="square" lIns="0" tIns="0" rIns="0" bIns="0" rtlCol="0" anchor="ctr"/>
+          <a:lstStyle/>
+          <a:p>
+            <a:pPr indent="0" marL="0">
+              <a:buNone/>
+            </a:pPr>
+            <a:r>
+              <a:rPr lang="en-US" sz="1300" b="1" dirty="0">
+                <a:solidFill>
+                  <a:schemeClr val="accent1"/>
+                </a:solidFill>
+              </a:rPr>
+              <a:t>The method</a:t>
+            </a:r>
+            <a:endParaRPr lang="en-US" sz="1300" dirty="0"/>
+          </a:p>
+        </p:txBody>
+      </p:sp>
+      <p:sp>
+        <p:nvSpPr>
+          <p:cNvPr id="11" name="Card head"/>
+          <p:cNvSpPr txBox="1"/>
+          <p:nvPr/>
+        </p:nvSpPr>
+        <p:spPr>
+          <a:xfrm>
+            <a:off x="4521098" y="2148840"/>
+            <a:ext cx="3149498" cy="576072"/>
+          </a:xfrm>
+          <a:prstGeom prst="rect">
+            <a:avLst/>
+          </a:prstGeom>
+          <a:noFill/>
+          <a:ln/>
+        </p:spPr>
+        <p:txBody>
+          <a:bodyPr wrap="square" lIns="0" tIns="0" rIns="0" bIns="0" rtlCol="0" anchor="t"/>
+          <a:lstStyle/>
+          <a:p>
+            <a:pPr indent="0" marL="0">
+              <a:buNone/>
+            </a:pPr>
+            <a:r>
+              <a:rPr lang="en-US" sz="1600" b="1" dirty="0">
                 <a:solidFill>
                   <a:schemeClr val="tx1"/>
                 </a:solidFill>
-              </a:rPr>
-              <a:t> a one-page note to the board: the efficient plans, the prices between them, the recommended plan with the prices or aspirations that select it, and what each owner gives up. About 75 minutes.</a:t>
-            </a:r>
-            <a:endParaRPr lang="en-US" sz="1400" dirty="0"/>
+                <a:latin typeface="Cambria" pitchFamily="34" charset="0"/>
+                <a:ea typeface="Cambria" pitchFamily="34" charset="-122"/>
+                <a:cs typeface="Cambria" pitchFamily="34" charset="-120"/>
+              </a:rPr>
+              <a:t>Score candidates on every objective</a:t>
+            </a:r>
+            <a:endParaRPr lang="en-US" sz="1600" dirty="0"/>
+          </a:p>
+        </p:txBody>
+      </p:sp>
+      <p:sp>
+        <p:nvSpPr>
+          <p:cNvPr id="12" name="Card text"/>
+          <p:cNvSpPr txBox="1"/>
+          <p:nvPr/>
+        </p:nvSpPr>
+        <p:spPr>
+          <a:xfrm>
+            <a:off x="4521098" y="2798064"/>
+            <a:ext cx="3149498" cy="868680"/>
+          </a:xfrm>
+          <a:prstGeom prst="rect">
+            <a:avLst/>
+          </a:prstGeom>
+          <a:noFill/>
+          <a:ln/>
+        </p:spPr>
+        <p:txBody>
+          <a:bodyPr wrap="square" lIns="0" tIns="0" rIns="0" bIns="0" rtlCol="0" anchor="t"/>
+          <a:lstStyle/>
+          <a:p>
+            <a:pPr indent="0" marL="0">
+              <a:buNone/>
+            </a:pPr>
+            <a:r>
+              <a:rPr lang="en-US" sz="1300" dirty="0">
+                <a:solidFill>
+                  <a:schemeClr val="tx2"/>
+                </a:solidFill>
+              </a:rPr>
+              <a:t>About ten timetables scored on punctuality, passengers, and cost; the board chose and combined two.</a:t>
+            </a:r>
+            <a:endParaRPr lang="en-US" sz="1300" dirty="0"/>
+          </a:p>
+        </p:txBody>
+      </p:sp>
+      <p:sp>
+        <p:nvSpPr>
+          <p:cNvPr id="13" name="Card"/>
+          <p:cNvSpPr/>
+          <p:nvPr/>
+        </p:nvSpPr>
+        <p:spPr>
+          <a:xfrm>
+            <a:off x="8127797" y="1691640"/>
+            <a:ext cx="3515258" cy="2103120"/>
+          </a:xfrm>
+          <a:prstGeom prst="roundRect">
+            <a:avLst>
+              <a:gd name="adj" fmla="val 3478"/>
+            </a:avLst>
+          </a:prstGeom>
+          <a:solidFill>
+            <a:schemeClr val="tx1"/>
+          </a:solidFill>
+          <a:ln w="9525">
+            <a:solidFill>
+              <a:srgbClr val="0F1E3D"/>
+            </a:solidFill>
+            <a:prstDash val="solid"/>
+          </a:ln>
+        </p:spPr>
+      </p:sp>
+      <p:sp>
+        <p:nvSpPr>
+          <p:cNvPr id="14" name="Card label"/>
+          <p:cNvSpPr txBox="1"/>
+          <p:nvPr/>
+        </p:nvSpPr>
+        <p:spPr>
+          <a:xfrm>
+            <a:off x="8310677" y="1819656"/>
+            <a:ext cx="3149498" cy="310896"/>
+          </a:xfrm>
+          <a:prstGeom prst="rect">
+            <a:avLst/>
+          </a:prstGeom>
+          <a:noFill/>
+          <a:ln/>
+        </p:spPr>
+        <p:txBody>
+          <a:bodyPr wrap="square" lIns="0" tIns="0" rIns="0" bIns="0" rtlCol="0" anchor="ctr"/>
+          <a:lstStyle/>
+          <a:p>
+            <a:pPr indent="0" marL="0">
+              <a:buNone/>
+            </a:pPr>
+            <a:r>
+              <a:rPr lang="en-US" sz="1300" b="1" dirty="0">
+                <a:solidFill>
+                  <a:schemeClr val="accent1"/>
+                </a:solidFill>
+              </a:rPr>
+              <a:t>The result</a:t>
+            </a:r>
+            <a:endParaRPr lang="en-US" sz="1300" dirty="0"/>
+          </a:p>
+        </p:txBody>
+      </p:sp>
+      <p:sp>
+        <p:nvSpPr>
+          <p:cNvPr id="15" name="Card head"/>
+          <p:cNvSpPr txBox="1"/>
+          <p:nvPr/>
+        </p:nvSpPr>
+        <p:spPr>
+          <a:xfrm>
+            <a:off x="8310677" y="2148840"/>
+            <a:ext cx="3149498" cy="576072"/>
+          </a:xfrm>
+          <a:prstGeom prst="rect">
+            <a:avLst/>
+          </a:prstGeom>
+          <a:noFill/>
+          <a:ln/>
+        </p:spPr>
+        <p:txBody>
+          <a:bodyPr wrap="square" lIns="0" tIns="0" rIns="0" bIns="0" rtlCol="0" anchor="t"/>
+          <a:lstStyle/>
+          <a:p>
+            <a:pPr indent="0" marL="0">
+              <a:buNone/>
+            </a:pPr>
+            <a:r>
+              <a:rPr lang="en-US" sz="1600" b="1" dirty="0">
+                <a:solidFill>
+                  <a:schemeClr val="bg1"/>
+                </a:solidFill>
+                <a:latin typeface="Cambria" pitchFamily="34" charset="0"/>
+                <a:ea typeface="Cambria" pitchFamily="34" charset="-122"/>
+                <a:cs typeface="Cambria" pitchFamily="34" charset="-120"/>
+              </a:rPr>
+              <a:t>Punctuality from 84.8% to 87%</a:t>
+            </a:r>
+            <a:endParaRPr lang="en-US" sz="1600" dirty="0"/>
+          </a:p>
+        </p:txBody>
+      </p:sp>
+      <p:sp>
+        <p:nvSpPr>
+          <p:cNvPr id="16" name="Card text"/>
+          <p:cNvSpPr txBox="1"/>
+          <p:nvPr/>
+        </p:nvSpPr>
+        <p:spPr>
+          <a:xfrm>
+            <a:off x="8310677" y="2798064"/>
+            <a:ext cx="3149498" cy="868680"/>
+          </a:xfrm>
+          <a:prstGeom prst="rect">
+            <a:avLst/>
+          </a:prstGeom>
+          <a:noFill/>
+          <a:ln/>
+        </p:spPr>
+        <p:txBody>
+          <a:bodyPr wrap="square" lIns="0" tIns="0" rIns="0" bIns="0" rtlCol="0" anchor="t"/>
+          <a:lstStyle/>
+          <a:p>
+            <a:pPr indent="0" marL="0">
+              <a:buNone/>
+            </a:pPr>
+            <a:r>
+              <a:rPr lang="en-US" sz="1300" dirty="0">
+                <a:solidFill>
+                  <a:schemeClr val="bg2"/>
+                </a:solidFill>
+              </a:rPr>
+              <a:t>40 million euros more annual profit, by the authors' account; the 2008 Franz Edelman Award.</a:t>
+            </a:r>
+            <a:endParaRPr lang="en-US" sz="1300" dirty="0"/>
+          </a:p>
+        </p:txBody>
+      </p:sp>
+      <p:sp>
+        <p:nvSpPr>
+          <p:cNvPr id="17" name="Card"/>
+          <p:cNvSpPr/>
+          <p:nvPr/>
+        </p:nvSpPr>
+        <p:spPr>
+          <a:xfrm>
+            <a:off x="548640" y="4069080"/>
+            <a:ext cx="3515258" cy="2103120"/>
+          </a:xfrm>
+          <a:prstGeom prst="roundRect">
+            <a:avLst>
+              <a:gd name="adj" fmla="val 3478"/>
+            </a:avLst>
+          </a:prstGeom>
+          <a:solidFill>
+            <a:schemeClr val="bg2"/>
+          </a:solidFill>
+          <a:ln w="9525">
+            <a:solidFill>
+              <a:srgbClr val="C4CBD8"/>
+            </a:solidFill>
+            <a:prstDash val="solid"/>
+          </a:ln>
+        </p:spPr>
+      </p:sp>
+      <p:sp>
+        <p:nvSpPr>
+          <p:cNvPr id="18" name="Card label"/>
+          <p:cNvSpPr txBox="1"/>
+          <p:nvPr/>
+        </p:nvSpPr>
+        <p:spPr>
+          <a:xfrm>
+            <a:off x="731520" y="4197096"/>
+            <a:ext cx="3149498" cy="310896"/>
+          </a:xfrm>
+          <a:prstGeom prst="rect">
+            <a:avLst/>
+          </a:prstGeom>
+          <a:noFill/>
+          <a:ln/>
+        </p:spPr>
+        <p:txBody>
+          <a:bodyPr wrap="square" lIns="0" tIns="0" rIns="0" bIns="0" rtlCol="0" anchor="ctr"/>
+          <a:lstStyle/>
+          <a:p>
+            <a:pPr indent="0" marL="0">
+              <a:buNone/>
+            </a:pPr>
+            <a:r>
+              <a:rPr lang="en-US" sz="1300" b="1" dirty="0">
+                <a:solidFill>
+                  <a:schemeClr val="accent1"/>
+                </a:solidFill>
+              </a:rPr>
+              <a:t>Making it work</a:t>
+            </a:r>
+            <a:endParaRPr lang="en-US" sz="1300" dirty="0"/>
+          </a:p>
+        </p:txBody>
+      </p:sp>
+      <p:sp>
+        <p:nvSpPr>
+          <p:cNvPr id="19" name="Card head"/>
+          <p:cNvSpPr txBox="1"/>
+          <p:nvPr/>
+        </p:nvSpPr>
+        <p:spPr>
+          <a:xfrm>
+            <a:off x="731520" y="4526280"/>
+            <a:ext cx="3149498" cy="576072"/>
+          </a:xfrm>
+          <a:prstGeom prst="rect">
+            <a:avLst/>
+          </a:prstGeom>
+          <a:noFill/>
+          <a:ln/>
+        </p:spPr>
+        <p:txBody>
+          <a:bodyPr wrap="square" lIns="0" tIns="0" rIns="0" bIns="0" rtlCol="0" anchor="t"/>
+          <a:lstStyle/>
+          <a:p>
+            <a:pPr indent="0" marL="0">
+              <a:buNone/>
+            </a:pPr>
+            <a:r>
+              <a:rPr lang="en-US" sz="1600" b="1" dirty="0">
+                <a:solidFill>
+                  <a:schemeClr val="tx1"/>
+                </a:solidFill>
+                <a:latin typeface="Cambria" pitchFamily="34" charset="0"/>
+                <a:ea typeface="Cambria" pitchFamily="34" charset="-122"/>
+                <a:cs typeface="Cambria" pitchFamily="34" charset="-120"/>
+              </a:rPr>
+              <a:t>Late obstacles</a:t>
+            </a:r>
+            <a:endParaRPr lang="en-US" sz="1600" dirty="0"/>
+          </a:p>
+        </p:txBody>
+      </p:sp>
+      <p:sp>
+        <p:nvSpPr>
+          <p:cNvPr id="20" name="Card text"/>
+          <p:cNvSpPr txBox="1"/>
+          <p:nvPr/>
+        </p:nvSpPr>
+        <p:spPr>
+          <a:xfrm>
+            <a:off x="731520" y="5175504"/>
+            <a:ext cx="3149498" cy="868680"/>
+          </a:xfrm>
+          <a:prstGeom prst="rect">
+            <a:avLst/>
+          </a:prstGeom>
+          <a:noFill/>
+          <a:ln/>
+        </p:spPr>
+        <p:txBody>
+          <a:bodyPr wrap="square" lIns="0" tIns="0" rIns="0" bIns="0" rtlCol="0" anchor="t"/>
+          <a:lstStyle/>
+          <a:p>
+            <a:pPr indent="0" marL="0">
+              <a:buNone/>
+            </a:pPr>
+            <a:r>
+              <a:rPr lang="en-US" sz="1300" dirty="0">
+                <a:solidFill>
+                  <a:schemeClr val="tx2"/>
+                </a:solidFill>
+              </a:rPr>
+              <a:t>A crew shortage and late tracks were absorbed by running the crew-scheduling system again.</a:t>
+            </a:r>
+            <a:endParaRPr lang="en-US" sz="1300" dirty="0"/>
+          </a:p>
+        </p:txBody>
+      </p:sp>
+      <p:sp>
+        <p:nvSpPr>
+          <p:cNvPr id="21" name="Card"/>
+          <p:cNvSpPr/>
+          <p:nvPr/>
+        </p:nvSpPr>
+        <p:spPr>
+          <a:xfrm>
+            <a:off x="4338218" y="4069080"/>
+            <a:ext cx="3515258" cy="2103120"/>
+          </a:xfrm>
+          <a:prstGeom prst="roundRect">
+            <a:avLst>
+              <a:gd name="adj" fmla="val 3478"/>
+            </a:avLst>
+          </a:prstGeom>
+          <a:solidFill>
+            <a:schemeClr val="bg2"/>
+          </a:solidFill>
+          <a:ln w="9525">
+            <a:solidFill>
+              <a:srgbClr val="C4CBD8"/>
+            </a:solidFill>
+            <a:prstDash val="solid"/>
+          </a:ln>
+        </p:spPr>
+      </p:sp>
+      <p:sp>
+        <p:nvSpPr>
+          <p:cNvPr id="22" name="Card label"/>
+          <p:cNvSpPr txBox="1"/>
+          <p:nvPr/>
+        </p:nvSpPr>
+        <p:spPr>
+          <a:xfrm>
+            <a:off x="4521098" y="4197096"/>
+            <a:ext cx="3149498" cy="310896"/>
+          </a:xfrm>
+          <a:prstGeom prst="rect">
+            <a:avLst/>
+          </a:prstGeom>
+          <a:noFill/>
+          <a:ln/>
+        </p:spPr>
+        <p:txBody>
+          <a:bodyPr wrap="square" lIns="0" tIns="0" rIns="0" bIns="0" rtlCol="0" anchor="ctr"/>
+          <a:lstStyle/>
+          <a:p>
+            <a:pPr indent="0" marL="0">
+              <a:buNone/>
+            </a:pPr>
+            <a:r>
+              <a:rPr lang="en-US" sz="1300" b="1" dirty="0">
+                <a:solidFill>
+                  <a:schemeClr val="accent1"/>
+                </a:solidFill>
+              </a:rPr>
+              <a:t>What Meridian takes</a:t>
+            </a:r>
+            <a:endParaRPr lang="en-US" sz="1300" dirty="0"/>
+          </a:p>
+        </p:txBody>
+      </p:sp>
+      <p:sp>
+        <p:nvSpPr>
+          <p:cNvPr id="23" name="Card head"/>
+          <p:cNvSpPr txBox="1"/>
+          <p:nvPr/>
+        </p:nvSpPr>
+        <p:spPr>
+          <a:xfrm>
+            <a:off x="4521098" y="4526280"/>
+            <a:ext cx="3149498" cy="576072"/>
+          </a:xfrm>
+          <a:prstGeom prst="rect">
+            <a:avLst/>
+          </a:prstGeom>
+          <a:noFill/>
+          <a:ln/>
+        </p:spPr>
+        <p:txBody>
+          <a:bodyPr wrap="square" lIns="0" tIns="0" rIns="0" bIns="0" rtlCol="0" anchor="t"/>
+          <a:lstStyle/>
+          <a:p>
+            <a:pPr indent="0" marL="0">
+              <a:buNone/>
+            </a:pPr>
+            <a:r>
+              <a:rPr lang="en-US" sz="1600" b="1" dirty="0">
+                <a:solidFill>
+                  <a:schemeClr val="tx1"/>
+                </a:solidFill>
+                <a:latin typeface="Cambria" pitchFamily="34" charset="0"/>
+                <a:ea typeface="Cambria" pitchFamily="34" charset="-122"/>
+                <a:cs typeface="Cambria" pitchFamily="34" charset="-120"/>
+              </a:rPr>
+              <a:t>Choices before the choice</a:t>
+            </a:r>
+            <a:endParaRPr lang="en-US" sz="1600" dirty="0"/>
+          </a:p>
+        </p:txBody>
+      </p:sp>
+      <p:sp>
+        <p:nvSpPr>
+          <p:cNvPr id="24" name="Card text"/>
+          <p:cNvSpPr txBox="1"/>
+          <p:nvPr/>
+        </p:nvSpPr>
+        <p:spPr>
+          <a:xfrm>
+            <a:off x="4521098" y="5175504"/>
+            <a:ext cx="3149498" cy="868680"/>
+          </a:xfrm>
+          <a:prstGeom prst="rect">
+            <a:avLst/>
+          </a:prstGeom>
+          <a:noFill/>
+          <a:ln/>
+        </p:spPr>
+        <p:txBody>
+          <a:bodyPr wrap="square" lIns="0" tIns="0" rIns="0" bIns="0" rtlCol="0" anchor="t"/>
+          <a:lstStyle/>
+          <a:p>
+            <a:pPr indent="0" marL="0">
+              <a:buNone/>
+            </a:pPr>
+            <a:r>
+              <a:rPr lang="en-US" sz="1300" dirty="0">
+                <a:solidFill>
+                  <a:schemeClr val="tx2"/>
+                </a:solidFill>
+              </a:rPr>
+              <a:t>Worked Example 12.1 showed Meridian's board its choices; NS's board chose from scored candidates.</a:t>
+            </a:r>
+            <a:endParaRPr lang="en-US" sz="1300" dirty="0"/>
+          </a:p>
+        </p:txBody>
+      </p:sp>
+      <p:sp>
+        <p:nvSpPr>
+          <p:cNvPr id="25" name="Card"/>
+          <p:cNvSpPr/>
+          <p:nvPr/>
+        </p:nvSpPr>
+        <p:spPr>
+          <a:xfrm>
+            <a:off x="8127797" y="4069080"/>
+            <a:ext cx="3515258" cy="2103120"/>
+          </a:xfrm>
+          <a:prstGeom prst="roundRect">
+            <a:avLst>
+              <a:gd name="adj" fmla="val 3478"/>
+            </a:avLst>
+          </a:prstGeom>
+          <a:solidFill>
+            <a:schemeClr val="bg2"/>
+          </a:solidFill>
+          <a:ln w="9525">
+            <a:solidFill>
+              <a:srgbClr val="C4CBD8"/>
+            </a:solidFill>
+            <a:prstDash val="solid"/>
+          </a:ln>
+        </p:spPr>
+      </p:sp>
+      <p:sp>
+        <p:nvSpPr>
+          <p:cNvPr id="26" name="Card label"/>
+          <p:cNvSpPr txBox="1"/>
+          <p:nvPr/>
+        </p:nvSpPr>
+        <p:spPr>
+          <a:xfrm>
+            <a:off x="8310677" y="4197096"/>
+            <a:ext cx="3149498" cy="310896"/>
+          </a:xfrm>
+          <a:prstGeom prst="rect">
+            <a:avLst/>
+          </a:prstGeom>
+          <a:noFill/>
+          <a:ln/>
+        </p:spPr>
+        <p:txBody>
+          <a:bodyPr wrap="square" lIns="0" tIns="0" rIns="0" bIns="0" rtlCol="0" anchor="ctr"/>
+          <a:lstStyle/>
+          <a:p>
+            <a:pPr indent="0" marL="0">
+              <a:buNone/>
+            </a:pPr>
+            <a:r>
+              <a:rPr lang="en-US" sz="1300" b="1" dirty="0">
+                <a:solidFill>
+                  <a:schemeClr val="accent1"/>
+                </a:solidFill>
+              </a:rPr>
+              <a:t>For the board</a:t>
+            </a:r>
+            <a:endParaRPr lang="en-US" sz="1300" dirty="0"/>
+          </a:p>
+        </p:txBody>
+      </p:sp>
+      <p:sp>
+        <p:nvSpPr>
+          <p:cNvPr id="27" name="Card head"/>
+          <p:cNvSpPr txBox="1"/>
+          <p:nvPr/>
+        </p:nvSpPr>
+        <p:spPr>
+          <a:xfrm>
+            <a:off x="8310677" y="4526280"/>
+            <a:ext cx="3149498" cy="576072"/>
+          </a:xfrm>
+          <a:prstGeom prst="rect">
+            <a:avLst/>
+          </a:prstGeom>
+          <a:noFill/>
+          <a:ln/>
+        </p:spPr>
+        <p:txBody>
+          <a:bodyPr wrap="square" lIns="0" tIns="0" rIns="0" bIns="0" rtlCol="0" anchor="t"/>
+          <a:lstStyle/>
+          <a:p>
+            <a:pPr indent="0" marL="0">
+              <a:buNone/>
+            </a:pPr>
+            <a:r>
+              <a:rPr lang="en-US" sz="1600" b="1" dirty="0">
+                <a:solidFill>
+                  <a:schemeClr val="tx1"/>
+                </a:solidFill>
+                <a:latin typeface="Cambria" pitchFamily="34" charset="0"/>
+                <a:ea typeface="Cambria" pitchFamily="34" charset="-122"/>
+                <a:cs typeface="Cambria" pitchFamily="34" charset="-120"/>
+              </a:rPr>
+              <a:t>Whose preference selects?</a:t>
+            </a:r>
+            <a:endParaRPr lang="en-US" sz="1600" dirty="0"/>
+          </a:p>
+        </p:txBody>
+      </p:sp>
+      <p:sp>
+        <p:nvSpPr>
+          <p:cNvPr id="28" name="Card text"/>
+          <p:cNvSpPr txBox="1"/>
+          <p:nvPr/>
+        </p:nvSpPr>
+        <p:spPr>
+          <a:xfrm>
+            <a:off x="8310677" y="5175504"/>
+            <a:ext cx="3149498" cy="868680"/>
+          </a:xfrm>
+          <a:prstGeom prst="rect">
+            <a:avLst/>
+          </a:prstGeom>
+          <a:noFill/>
+          <a:ln/>
+        </p:spPr>
+        <p:txBody>
+          <a:bodyPr wrap="square" lIns="0" tIns="0" rIns="0" bIns="0" rtlCol="0" anchor="t"/>
+          <a:lstStyle/>
+          <a:p>
+            <a:pPr indent="0" marL="0">
+              <a:buNone/>
+            </a:pPr>
+            <a:r>
+              <a:rPr lang="en-US" sz="1300" dirty="0">
+                <a:solidFill>
+                  <a:schemeClr val="tx2"/>
+                </a:solidFill>
+              </a:rPr>
+              <a:t>When the losers of a trade-off object, who decides whether to move along the frontier?</a:t>
+            </a:r>
+            <a:endParaRPr lang="en-US" sz="1300" dirty="0"/>
           </a:p>
         </p:txBody>
       </p:sp>
@@ -15627,7 +15700,7 @@
                   <a:schemeClr val="accent1"/>
                 </a:solidFill>
               </a:rPr>
-              <a:t>KEY TAKEAWAYS</a:t>
+              <a:t>AXIOM LAB 2.12 · MODULE AXIOM-12</a:t>
             </a:r>
             <a:endParaRPr lang="en-US" sz="1200" dirty="0"/>
           </a:p>
@@ -15668,22 +15741,105 @@
                 <a:ea typeface="Cambria" pitchFamily="34" charset="-122"/>
                 <a:cs typeface="Cambria" pitchFamily="34" charset="-120"/>
               </a:rPr>
-              <a:t>What to carry forward</a:t>
+              <a:t>Payouts, savings and the reserve, in AXIOM</a:t>
             </a:r>
             <a:endParaRPr lang="en-US" sz="3200" dirty="0"/>
           </a:p>
         </p:txBody>
       </p:sp>
-      <p:sp>
-        <p:nvSpPr>
-          <p:cNvPr id="5" name="Number"/>
+      <p:pic>
+        <p:nvPicPr>
+          <p:cNvPr id="5" name="AXIOM logo" descr="AXIOM">    </p:cNvPr>
+          <p:cNvPicPr>
+            <a:picLocks noChangeAspect="1"/>
+          </p:cNvPicPr>
+          <p:nvPr/>
+        </p:nvPicPr>
+        <p:blipFill>
+          <a:blip r:embed="rId1"/>
+          <a:stretch>
+            <a:fillRect/>
+          </a:stretch>
+        </p:blipFill>
+        <p:spPr>
+          <a:xfrm>
+            <a:off x="9539935" y="310896"/>
+            <a:ext cx="2103120" cy="420624"/>
+          </a:xfrm>
+          <a:prstGeom prst="rect">
+            <a:avLst/>
+          </a:prstGeom>
+        </p:spPr>
+      </p:pic>
+      <p:sp>
+        <p:nvSpPr>
+          <p:cNvPr id="6" name="Situation"/>
+          <p:cNvSpPr txBox="1"/>
+          <p:nvPr/>
+        </p:nvSpPr>
+        <p:spPr>
+          <a:xfrm>
+            <a:off x="548640" y="1645920"/>
+            <a:ext cx="11094415" cy="777240"/>
+          </a:xfrm>
+          <a:prstGeom prst="rect">
+            <a:avLst/>
+          </a:prstGeom>
+          <a:noFill/>
+          <a:ln/>
+        </p:spPr>
+        <p:txBody>
+          <a:bodyPr wrap="square" lIns="0" tIns="0" rIns="0" bIns="0" rtlCol="0" anchor="t"/>
+          <a:lstStyle/>
+          <a:p>
+            <a:pPr indent="0" marL="0">
+              <a:buNone/>
+            </a:pPr>
+            <a:r>
+              <a:rPr lang="en-US" sz="1500" dirty="0">
+                <a:solidFill>
+                  <a:schemeClr val="tx1"/>
+                </a:solidFill>
+              </a:rPr>
+              <a:t>The board will not adopt a single measure until it has seen what each owner gives up. Open AXIOM, choose Lab 2.12 and load the Meridian automation instance: Chapter 5's program and the three owners' objectives.</a:t>
+            </a:r>
+            <a:endParaRPr lang="en-US" sz="1500" dirty="0"/>
+          </a:p>
+        </p:txBody>
+      </p:sp>
+      <p:sp>
+        <p:nvSpPr>
+          <p:cNvPr id="7" name="Flow line"/>
           <p:cNvSpPr/>
           <p:nvPr/>
         </p:nvSpPr>
         <p:spPr>
           <a:xfrm>
-            <a:off x="548640" y="1737360"/>
-            <a:ext cx="566928" cy="566928"/>
+            <a:off x="1658082" y="2880360"/>
+            <a:ext cx="8875532" cy="0"/>
+          </a:xfrm>
+          <a:prstGeom prst="line">
+            <a:avLst/>
+          </a:prstGeom>
+          <a:noFill/>
+          <a:ln w="25400">
+            <a:solidFill>
+              <a:srgbClr val="C4CBD8"/>
+            </a:solidFill>
+            <a:prstDash val="solid"/>
+          </a:ln>
+        </p:spPr>
+      </p:sp>
+      <p:sp>
+        <p:nvSpPr>
+          <p:cNvPr id="8" name="Number"/>
+          <p:cNvSpPr/>
+          <p:nvPr/>
+        </p:nvSpPr>
+        <p:spPr>
+          <a:xfrm>
+            <a:off x="1383762" y="2606040"/>
+            <a:ext cx="548640" cy="548640"/>
           </a:xfrm>
           <a:prstGeom prst="ellipse">
             <a:avLst/>
@@ -15701,14 +15857,14 @@
       </p:sp>
       <p:sp>
         <p:nvSpPr>
-          <p:cNvPr id="6" name="Text 3"/>
+          <p:cNvPr id="9" name="Text 5"/>
           <p:cNvSpPr txBox="1"/>
           <p:nvPr/>
         </p:nvSpPr>
         <p:spPr>
           <a:xfrm>
-            <a:off x="548640" y="1737360"/>
-            <a:ext cx="566928" cy="566928"/>
+            <a:off x="1383762" y="2606040"/>
+            <a:ext cx="548640" cy="548640"/>
           </a:xfrm>
           <a:prstGeom prst="rect">
             <a:avLst/>
@@ -15724,7 +15880,7 @@
               <a:buNone/>
             </a:pPr>
             <a:r>
-              <a:rPr lang="en-US" sz="1500" b="1" dirty="0">
+              <a:rPr lang="en-US" sz="1600" b="1" dirty="0">
                 <a:solidFill>
                   <a:schemeClr val="bg1"/>
                 </a:solidFill>
@@ -15734,20 +15890,20 @@
               </a:rPr>
               <a:t>1</a:t>
             </a:r>
-            <a:endParaRPr lang="en-US" sz="1500" dirty="0"/>
-          </a:p>
-        </p:txBody>
-      </p:sp>
-      <p:sp>
-        <p:nvSpPr>
-          <p:cNvPr id="7" name="Row text"/>
+            <a:endParaRPr lang="en-US" sz="1600" dirty="0"/>
+          </a:p>
+        </p:txBody>
+      </p:sp>
+      <p:sp>
+        <p:nvSpPr>
+          <p:cNvPr id="10" name="Flow head"/>
           <p:cNvSpPr txBox="1"/>
           <p:nvPr/>
         </p:nvSpPr>
         <p:spPr>
           <a:xfrm>
-            <a:off x="1325880" y="1691640"/>
-            <a:ext cx="10317175" cy="841248"/>
+            <a:off x="621792" y="3291840"/>
+            <a:ext cx="2072579" cy="548640"/>
           </a:xfrm>
           <a:prstGeom prst="rect">
             <a:avLst/>
@@ -15756,34 +15912,73 @@
           <a:ln/>
         </p:spPr>
         <p:txBody>
-          <a:bodyPr wrap="square" lIns="0" tIns="0" rIns="0" bIns="0" rtlCol="0" anchor="ctr"/>
-          <a:lstStyle/>
-          <a:p>
-            <a:pPr indent="0" marL="0">
+          <a:bodyPr wrap="square" lIns="0" tIns="0" rIns="0" bIns="0" rtlCol="0" anchor="t"/>
+          <a:lstStyle/>
+          <a:p>
+            <a:pPr algn="ctr" indent="0" marL="0">
               <a:buNone/>
             </a:pPr>
             <a:r>
-              <a:rPr lang="en-US" sz="1500" dirty="0">
+              <a:rPr lang="en-US" sz="1600" b="1" dirty="0">
                 <a:solidFill>
                   <a:schemeClr val="tx1"/>
                 </a:solidFill>
-              </a:rPr>
-              <a:t>A transformation program has several owners and several objectives. Compute the frontier first: efficient plans exist, dominated plans can be discarded, and bounds on all objectives but one trace the frontier exactly.</a:t>
-            </a:r>
-            <a:endParaRPr lang="en-US" sz="1500" dirty="0"/>
-          </a:p>
-        </p:txBody>
-      </p:sp>
-      <p:sp>
-        <p:nvSpPr>
-          <p:cNvPr id="8" name="Number"/>
+                <a:latin typeface="Cambria" pitchFamily="34" charset="0"/>
+                <a:ea typeface="Cambria" pitchFamily="34" charset="-122"/>
+                <a:cs typeface="Cambria" pitchFamily="34" charset="-120"/>
+              </a:rPr>
+              <a:t>Enumerate</a:t>
+            </a:r>
+            <a:endParaRPr lang="en-US" sz="1600" dirty="0"/>
+          </a:p>
+        </p:txBody>
+      </p:sp>
+      <p:sp>
+        <p:nvSpPr>
+          <p:cNvPr id="11" name="Flow text"/>
+          <p:cNvSpPr txBox="1"/>
+          <p:nvPr/>
+        </p:nvSpPr>
+        <p:spPr>
+          <a:xfrm>
+            <a:off x="640080" y="3867912"/>
+            <a:ext cx="2036003" cy="1554480"/>
+          </a:xfrm>
+          <a:prstGeom prst="rect">
+            <a:avLst/>
+          </a:prstGeom>
+          <a:noFill/>
+          <a:ln/>
+        </p:spPr>
+        <p:txBody>
+          <a:bodyPr wrap="square" lIns="0" tIns="0" rIns="0" bIns="0" rtlCol="0" anchor="t"/>
+          <a:lstStyle/>
+          <a:p>
+            <a:pPr algn="ctr" indent="0" marL="0">
+              <a:buNone/>
+            </a:pPr>
+            <a:r>
+              <a:rPr lang="en-US" sz="1400" dirty="0">
+                <a:solidFill>
+                  <a:schemeClr val="tx2"/>
+                </a:solidFill>
+              </a:rPr>
+              <a:t>Solve the payouts for every schedule; plot payouts against savings; mark the dominated.</a:t>
+            </a:r>
+            <a:endParaRPr lang="en-US" sz="1400" dirty="0"/>
+          </a:p>
+        </p:txBody>
+      </p:sp>
+      <p:sp>
+        <p:nvSpPr>
+          <p:cNvPr id="12" name="Number"/>
           <p:cNvSpPr/>
           <p:nvPr/>
         </p:nvSpPr>
         <p:spPr>
           <a:xfrm>
-            <a:off x="548640" y="2633472"/>
-            <a:ext cx="566928" cy="566928"/>
+            <a:off x="3602645" y="2606040"/>
+            <a:ext cx="548640" cy="548640"/>
           </a:xfrm>
           <a:prstGeom prst="ellipse">
             <a:avLst/>
@@ -15801,14 +15996,14 @@
       </p:sp>
       <p:sp>
         <p:nvSpPr>
-          <p:cNvPr id="9" name="Text 6"/>
+          <p:cNvPr id="13" name="Text 9"/>
           <p:cNvSpPr txBox="1"/>
           <p:nvPr/>
         </p:nvSpPr>
         <p:spPr>
           <a:xfrm>
-            <a:off x="548640" y="2633472"/>
-            <a:ext cx="566928" cy="566928"/>
+            <a:off x="3602645" y="2606040"/>
+            <a:ext cx="548640" cy="548640"/>
           </a:xfrm>
           <a:prstGeom prst="rect">
             <a:avLst/>
@@ -15824,7 +16019,7 @@
               <a:buNone/>
             </a:pPr>
             <a:r>
-              <a:rPr lang="en-US" sz="1500" b="1" dirty="0">
+              <a:rPr lang="en-US" sz="1600" b="1" dirty="0">
                 <a:solidFill>
                   <a:schemeClr val="bg1"/>
                 </a:solidFill>
@@ -15834,20 +16029,20 @@
               </a:rPr>
               <a:t>2</a:t>
             </a:r>
-            <a:endParaRPr lang="en-US" sz="1500" dirty="0"/>
-          </a:p>
-        </p:txBody>
-      </p:sp>
-      <p:sp>
-        <p:nvSpPr>
-          <p:cNvPr id="10" name="Row text"/>
+            <a:endParaRPr lang="en-US" sz="1600" dirty="0"/>
+          </a:p>
+        </p:txBody>
+      </p:sp>
+      <p:sp>
+        <p:nvSpPr>
+          <p:cNvPr id="14" name="Flow head"/>
           <p:cNvSpPr txBox="1"/>
           <p:nvPr/>
         </p:nvSpPr>
         <p:spPr>
           <a:xfrm>
-            <a:off x="1325880" y="2587752"/>
-            <a:ext cx="10317175" cy="841248"/>
+            <a:off x="2840675" y="3291840"/>
+            <a:ext cx="2072579" cy="548640"/>
           </a:xfrm>
           <a:prstGeom prst="rect">
             <a:avLst/>
@@ -15856,34 +16051,73 @@
           <a:ln/>
         </p:spPr>
         <p:txBody>
-          <a:bodyPr wrap="square" lIns="0" tIns="0" rIns="0" bIns="0" rtlCol="0" anchor="ctr"/>
-          <a:lstStyle/>
-          <a:p>
-            <a:pPr indent="0" marL="0">
+          <a:bodyPr wrap="square" lIns="0" tIns="0" rIns="0" bIns="0" rtlCol="0" anchor="t"/>
+          <a:lstStyle/>
+          <a:p>
+            <a:pPr algn="ctr" indent="0" marL="0">
               <a:buNone/>
             </a:pPr>
             <a:r>
-              <a:rPr lang="en-US" sz="1500" dirty="0">
+              <a:rPr lang="en-US" sz="1600" b="1" dirty="0">
                 <a:solidFill>
                   <a:schemeClr val="tx1"/>
                 </a:solidFill>
-              </a:rPr>
-              <a:t>Weighted sums find efficient plans and reveal prices, but reach only the frontier's supported part; bounds' multipliers are the rates at which owners trade.</a:t>
-            </a:r>
-            <a:endParaRPr lang="en-US" sz="1500" dirty="0"/>
-          </a:p>
-        </p:txBody>
-      </p:sp>
-      <p:sp>
-        <p:nvSpPr>
-          <p:cNvPr id="11" name="Number"/>
+                <a:latin typeface="Cambria" pitchFamily="34" charset="0"/>
+                <a:ea typeface="Cambria" pitchFamily="34" charset="-122"/>
+                <a:cs typeface="Cambria" pitchFamily="34" charset="-120"/>
+              </a:rPr>
+              <a:t>Price the frontier</a:t>
+            </a:r>
+            <a:endParaRPr lang="en-US" sz="1600" dirty="0"/>
+          </a:p>
+        </p:txBody>
+      </p:sp>
+      <p:sp>
+        <p:nvSpPr>
+          <p:cNvPr id="15" name="Flow text"/>
+          <p:cNvSpPr txBox="1"/>
+          <p:nvPr/>
+        </p:nvSpPr>
+        <p:spPr>
+          <a:xfrm>
+            <a:off x="2858963" y="3867912"/>
+            <a:ext cx="2036003" cy="1554480"/>
+          </a:xfrm>
+          <a:prstGeom prst="rect">
+            <a:avLst/>
+          </a:prstGeom>
+          <a:noFill/>
+          <a:ln/>
+        </p:spPr>
+        <p:txBody>
+          <a:bodyPr wrap="square" lIns="0" tIns="0" rIns="0" bIns="0" rtlCol="0" anchor="t"/>
+          <a:lstStyle/>
+          <a:p>
+            <a:pPr algn="ctr" indent="0" marL="0">
+              <a:buNone/>
+            </a:pPr>
+            <a:r>
+              <a:rPr lang="en-US" sz="1400" dirty="0">
+                <a:solidFill>
+                  <a:schemeClr val="tx2"/>
+                </a:solidFill>
+              </a:rPr>
+              <a:t>The price between neighbouring efficient plans, and the prices each wins.</a:t>
+            </a:r>
+            <a:endParaRPr lang="en-US" sz="1400" dirty="0"/>
+          </a:p>
+        </p:txBody>
+      </p:sp>
+      <p:sp>
+        <p:nvSpPr>
+          <p:cNvPr id="16" name="Number"/>
           <p:cNvSpPr/>
           <p:nvPr/>
         </p:nvSpPr>
         <p:spPr>
           <a:xfrm>
-            <a:off x="548640" y="3529584"/>
-            <a:ext cx="566928" cy="566928"/>
+            <a:off x="5821528" y="2606040"/>
+            <a:ext cx="548640" cy="548640"/>
           </a:xfrm>
           <a:prstGeom prst="ellipse">
             <a:avLst/>
@@ -15901,14 +16135,14 @@
       </p:sp>
       <p:sp>
         <p:nvSpPr>
-          <p:cNvPr id="12" name="Text 9"/>
+          <p:cNvPr id="17" name="Text 13"/>
           <p:cNvSpPr txBox="1"/>
           <p:nvPr/>
         </p:nvSpPr>
         <p:spPr>
           <a:xfrm>
-            <a:off x="548640" y="3529584"/>
-            <a:ext cx="566928" cy="566928"/>
+            <a:off x="5821528" y="2606040"/>
+            <a:ext cx="548640" cy="548640"/>
           </a:xfrm>
           <a:prstGeom prst="rect">
             <a:avLst/>
@@ -15924,7 +16158,7 @@
               <a:buNone/>
             </a:pPr>
             <a:r>
-              <a:rPr lang="en-US" sz="1500" b="1" dirty="0">
+              <a:rPr lang="en-US" sz="1600" b="1" dirty="0">
                 <a:solidFill>
                   <a:schemeClr val="bg1"/>
                 </a:solidFill>
@@ -15934,20 +16168,20 @@
               </a:rPr>
               <a:t>3</a:t>
             </a:r>
-            <a:endParaRPr lang="en-US" sz="1500" dirty="0"/>
-          </a:p>
-        </p:txBody>
-      </p:sp>
-      <p:sp>
-        <p:nvSpPr>
-          <p:cNvPr id="13" name="Row text"/>
+            <a:endParaRPr lang="en-US" sz="1600" dirty="0"/>
+          </a:p>
+        </p:txBody>
+      </p:sp>
+      <p:sp>
+        <p:nvSpPr>
+          <p:cNvPr id="18" name="Flow head"/>
           <p:cNvSpPr txBox="1"/>
           <p:nvPr/>
         </p:nvSpPr>
         <p:spPr>
           <a:xfrm>
-            <a:off x="1325880" y="3483864"/>
-            <a:ext cx="10317175" cy="841248"/>
+            <a:off x="5059558" y="3291840"/>
+            <a:ext cx="2072579" cy="548640"/>
           </a:xfrm>
           <a:prstGeom prst="rect">
             <a:avLst/>
@@ -15956,34 +16190,73 @@
           <a:ln/>
         </p:spPr>
         <p:txBody>
-          <a:bodyPr wrap="square" lIns="0" tIns="0" rIns="0" bIns="0" rtlCol="0" anchor="ctr"/>
-          <a:lstStyle/>
-          <a:p>
-            <a:pPr indent="0" marL="0">
+          <a:bodyPr wrap="square" lIns="0" tIns="0" rIns="0" bIns="0" rtlCol="0" anchor="t"/>
+          <a:lstStyle/>
+          <a:p>
+            <a:pPr algn="ctr" indent="0" marL="0">
               <a:buNone/>
             </a:pPr>
             <a:r>
-              <a:rPr lang="en-US" sz="1500" dirty="0">
+              <a:rPr lang="en-US" sz="1600" b="1" dirty="0">
                 <a:solidFill>
                   <a:schemeClr val="tx1"/>
                 </a:solidFill>
-              </a:rPr>
-              <a:t>Reference points reach every efficient plan, dents included; preferences strictly increasing in every objective choose efficient plans; goals need a second stage.</a:t>
-            </a:r>
-            <a:endParaRPr lang="en-US" sz="1500" dirty="0"/>
-          </a:p>
-        </p:txBody>
-      </p:sp>
-      <p:sp>
-        <p:nvSpPr>
-          <p:cNvPr id="14" name="Number"/>
+                <a:latin typeface="Cambria" pitchFamily="34" charset="0"/>
+                <a:ea typeface="Cambria" pitchFamily="34" charset="-122"/>
+                <a:cs typeface="Cambria" pitchFamily="34" charset="-120"/>
+              </a:rPr>
+              <a:t>Bound the reserve</a:t>
+            </a:r>
+            <a:endParaRPr lang="en-US" sz="1600" dirty="0"/>
+          </a:p>
+        </p:txBody>
+      </p:sp>
+      <p:sp>
+        <p:nvSpPr>
+          <p:cNvPr id="19" name="Flow text"/>
+          <p:cNvSpPr txBox="1"/>
+          <p:nvPr/>
+        </p:nvSpPr>
+        <p:spPr>
+          <a:xfrm>
+            <a:off x="5077846" y="3867912"/>
+            <a:ext cx="2036003" cy="1554480"/>
+          </a:xfrm>
+          <a:prstGeom prst="rect">
+            <a:avLst/>
+          </a:prstGeom>
+          <a:noFill/>
+          <a:ln/>
+        </p:spPr>
+        <p:txBody>
+          <a:bodyPr wrap="square" lIns="0" tIns="0" rIns="0" bIns="0" rtlCol="0" anchor="t"/>
+          <a:lstStyle/>
+          <a:p>
+            <a:pPr algn="ctr" indent="0" marL="0">
+              <a:buNone/>
+            </a:pPr>
+            <a:r>
+              <a:rPr lang="en-US" sz="1400" dirty="0">
+                <a:solidFill>
+                  <a:schemeClr val="tx2"/>
+                </a:solidFill>
+              </a:rPr>
+              <a:t>Raise the reserve, read its multiplier, find where the rounds move.</a:t>
+            </a:r>
+            <a:endParaRPr lang="en-US" sz="1400" dirty="0"/>
+          </a:p>
+        </p:txBody>
+      </p:sp>
+      <p:sp>
+        <p:nvSpPr>
+          <p:cNvPr id="20" name="Number"/>
           <p:cNvSpPr/>
           <p:nvPr/>
         </p:nvSpPr>
         <p:spPr>
           <a:xfrm>
-            <a:off x="548640" y="4425696"/>
-            <a:ext cx="566928" cy="566928"/>
+            <a:off x="8040411" y="2606040"/>
+            <a:ext cx="548640" cy="548640"/>
           </a:xfrm>
           <a:prstGeom prst="ellipse">
             <a:avLst/>
@@ -16001,14 +16274,14 @@
       </p:sp>
       <p:sp>
         <p:nvSpPr>
-          <p:cNvPr id="15" name="Text 12"/>
+          <p:cNvPr id="21" name="Text 17"/>
           <p:cNvSpPr txBox="1"/>
           <p:nvPr/>
         </p:nvSpPr>
         <p:spPr>
           <a:xfrm>
-            <a:off x="548640" y="4425696"/>
-            <a:ext cx="566928" cy="566928"/>
+            <a:off x="8040411" y="2606040"/>
+            <a:ext cx="548640" cy="548640"/>
           </a:xfrm>
           <a:prstGeom prst="rect">
             <a:avLst/>
@@ -16024,7 +16297,7 @@
               <a:buNone/>
             </a:pPr>
             <a:r>
-              <a:rPr lang="en-US" sz="1500" b="1" dirty="0">
+              <a:rPr lang="en-US" sz="1600" b="1" dirty="0">
                 <a:solidFill>
                   <a:schemeClr val="bg1"/>
                 </a:solidFill>
@@ -16034,20 +16307,20 @@
               </a:rPr>
               <a:t>4</a:t>
             </a:r>
-            <a:endParaRPr lang="en-US" sz="1500" dirty="0"/>
-          </a:p>
-        </p:txBody>
-      </p:sp>
-      <p:sp>
-        <p:nvSpPr>
-          <p:cNvPr id="16" name="Row text"/>
+            <a:endParaRPr lang="en-US" sz="1600" dirty="0"/>
+          </a:p>
+        </p:txBody>
+      </p:sp>
+      <p:sp>
+        <p:nvSpPr>
+          <p:cNvPr id="22" name="Flow head"/>
           <p:cNvSpPr txBox="1"/>
           <p:nvPr/>
         </p:nvSpPr>
         <p:spPr>
           <a:xfrm>
-            <a:off x="1325880" y="4379976"/>
-            <a:ext cx="10317175" cy="841248"/>
+            <a:off x="7278441" y="3291840"/>
+            <a:ext cx="2072579" cy="548640"/>
           </a:xfrm>
           <a:prstGeom prst="rect">
             <a:avLst/>
@@ -16056,34 +16329,73 @@
           <a:ln/>
         </p:spPr>
         <p:txBody>
-          <a:bodyPr wrap="square" lIns="0" tIns="0" rIns="0" bIns="0" rtlCol="0" anchor="ctr"/>
-          <a:lstStyle/>
-          <a:p>
-            <a:pPr indent="0" marL="0">
+          <a:bodyPr wrap="square" lIns="0" tIns="0" rIns="0" bIns="0" rtlCol="0" anchor="t"/>
+          <a:lstStyle/>
+          <a:p>
+            <a:pPr algn="ctr" indent="0" marL="0">
               <a:buNone/>
             </a:pPr>
             <a:r>
-              <a:rPr lang="en-US" sz="1500" dirty="0">
+              <a:rPr lang="en-US" sz="1600" b="1" dirty="0">
                 <a:solidFill>
                   <a:schemeClr val="tx1"/>
                 </a:solidFill>
-              </a:rPr>
-              <a:t>Frontiers are bracketed by bounds, summarized by hypervolume, and approximated by evolutionary search, which is statistical, not certified.</a:t>
-            </a:r>
-            <a:endParaRPr lang="en-US" sz="1500" dirty="0"/>
-          </a:p>
-        </p:txBody>
-      </p:sp>
-      <p:sp>
-        <p:nvSpPr>
-          <p:cNvPr id="17" name="Number"/>
+                <a:latin typeface="Cambria" pitchFamily="34" charset="0"/>
+                <a:ea typeface="Cambria" pitchFamily="34" charset="-122"/>
+                <a:cs typeface="Cambria" pitchFamily="34" charset="-120"/>
+              </a:rPr>
+              <a:t>Choose</a:t>
+            </a:r>
+            <a:endParaRPr lang="en-US" sz="1600" dirty="0"/>
+          </a:p>
+        </p:txBody>
+      </p:sp>
+      <p:sp>
+        <p:nvSpPr>
+          <p:cNvPr id="23" name="Flow text"/>
+          <p:cNvSpPr txBox="1"/>
+          <p:nvPr/>
+        </p:nvSpPr>
+        <p:spPr>
+          <a:xfrm>
+            <a:off x="7296729" y="3867912"/>
+            <a:ext cx="2036003" cy="1554480"/>
+          </a:xfrm>
+          <a:prstGeom prst="rect">
+            <a:avLst/>
+          </a:prstGeom>
+          <a:noFill/>
+          <a:ln/>
+        </p:spPr>
+        <p:txBody>
+          <a:bodyPr wrap="square" lIns="0" tIns="0" rIns="0" bIns="0" rtlCol="0" anchor="t"/>
+          <a:lstStyle/>
+          <a:p>
+            <a:pPr algn="ctr" indent="0" marL="0">
+              <a:buNone/>
+            </a:pPr>
+            <a:r>
+              <a:rPr lang="en-US" sz="1400" dirty="0">
+                <a:solidFill>
+                  <a:schemeClr val="tx2"/>
+                </a:solidFill>
+              </a:rPr>
+              <a:t>Aspirations and weights for a Chebyshev choice; goals with and without a second stage.</a:t>
+            </a:r>
+            <a:endParaRPr lang="en-US" sz="1400" dirty="0"/>
+          </a:p>
+        </p:txBody>
+      </p:sp>
+      <p:sp>
+        <p:nvSpPr>
+          <p:cNvPr id="24" name="Number"/>
           <p:cNvSpPr/>
           <p:nvPr/>
         </p:nvSpPr>
         <p:spPr>
           <a:xfrm>
-            <a:off x="548640" y="5321808"/>
-            <a:ext cx="566928" cy="566928"/>
+            <a:off x="10259294" y="2606040"/>
+            <a:ext cx="548640" cy="548640"/>
           </a:xfrm>
           <a:prstGeom prst="ellipse">
             <a:avLst/>
@@ -16101,14 +16413,14 @@
       </p:sp>
       <p:sp>
         <p:nvSpPr>
-          <p:cNvPr id="18" name="Text 15"/>
+          <p:cNvPr id="25" name="Text 21"/>
           <p:cNvSpPr txBox="1"/>
           <p:nvPr/>
         </p:nvSpPr>
         <p:spPr>
           <a:xfrm>
-            <a:off x="548640" y="5321808"/>
-            <a:ext cx="566928" cy="566928"/>
+            <a:off x="10259294" y="2606040"/>
+            <a:ext cx="548640" cy="548640"/>
           </a:xfrm>
           <a:prstGeom prst="rect">
             <a:avLst/>
@@ -16124,7 +16436,7 @@
               <a:buNone/>
             </a:pPr>
             <a:r>
-              <a:rPr lang="en-US" sz="1500" b="1" dirty="0">
+              <a:rPr lang="en-US" sz="1600" b="1" dirty="0">
                 <a:solidFill>
                   <a:schemeClr val="bg1"/>
                 </a:solidFill>
@@ -16134,20 +16446,20 @@
               </a:rPr>
               <a:t>5</a:t>
             </a:r>
-            <a:endParaRPr lang="en-US" sz="1500" dirty="0"/>
-          </a:p>
-        </p:txBody>
-      </p:sp>
-      <p:sp>
-        <p:nvSpPr>
-          <p:cNvPr id="19" name="Row text"/>
+            <a:endParaRPr lang="en-US" sz="1600" dirty="0"/>
+          </a:p>
+        </p:txBody>
+      </p:sp>
+      <p:sp>
+        <p:nvSpPr>
+          <p:cNvPr id="26" name="Flow head"/>
           <p:cNvSpPr txBox="1"/>
           <p:nvPr/>
         </p:nvSpPr>
         <p:spPr>
           <a:xfrm>
-            <a:off x="1325880" y="5276088"/>
-            <a:ext cx="10317175" cy="841248"/>
+            <a:off x="9497324" y="3291840"/>
+            <a:ext cx="2072579" cy="548640"/>
           </a:xfrm>
           <a:prstGeom prst="rect">
             <a:avLst/>
@@ -16156,6 +16468,108 @@
           <a:ln/>
         </p:spPr>
         <p:txBody>
+          <a:bodyPr wrap="square" lIns="0" tIns="0" rIns="0" bIns="0" rtlCol="0" anchor="t"/>
+          <a:lstStyle/>
+          <a:p>
+            <a:pPr algn="ctr" indent="0" marL="0">
+              <a:buNone/>
+            </a:pPr>
+            <a:r>
+              <a:rPr lang="en-US" sz="1600" b="1" dirty="0">
+                <a:solidFill>
+                  <a:schemeClr val="tx1"/>
+                </a:solidFill>
+                <a:latin typeface="Cambria" pitchFamily="34" charset="0"/>
+                <a:ea typeface="Cambria" pitchFamily="34" charset="-122"/>
+                <a:cs typeface="Cambria" pitchFamily="34" charset="-120"/>
+              </a:rPr>
+              <a:t>Add uncertainty</a:t>
+            </a:r>
+            <a:endParaRPr lang="en-US" sz="1600" dirty="0"/>
+          </a:p>
+        </p:txBody>
+      </p:sp>
+      <p:sp>
+        <p:nvSpPr>
+          <p:cNvPr id="27" name="Flow text"/>
+          <p:cNvSpPr txBox="1"/>
+          <p:nvPr/>
+        </p:nvSpPr>
+        <p:spPr>
+          <a:xfrm>
+            <a:off x="9515612" y="3867912"/>
+            <a:ext cx="2036003" cy="1554480"/>
+          </a:xfrm>
+          <a:prstGeom prst="rect">
+            <a:avLst/>
+          </a:prstGeom>
+          <a:noFill/>
+          <a:ln/>
+        </p:spPr>
+        <p:txBody>
+          <a:bodyPr wrap="square" lIns="0" tIns="0" rIns="0" bIns="0" rtlCol="0" anchor="t"/>
+          <a:lstStyle/>
+          <a:p>
+            <a:pPr algn="ctr" indent="0" marL="0">
+              <a:buNone/>
+            </a:pPr>
+            <a:r>
+              <a:rPr lang="en-US" sz="1400" dirty="0">
+                <a:solidFill>
+                  <a:schemeClr val="tx2"/>
+                </a:solidFill>
+              </a:rPr>
+              <a:t>Load Chapter 9's packages; read the price of the board's appetite.</a:t>
+            </a:r>
+            <a:endParaRPr lang="en-US" sz="1400" dirty="0"/>
+          </a:p>
+        </p:txBody>
+      </p:sp>
+      <p:sp>
+        <p:nvSpPr>
+          <p:cNvPr id="28" name="Deliverable card"/>
+          <p:cNvSpPr/>
+          <p:nvPr/>
+        </p:nvSpPr>
+        <p:spPr>
+          <a:xfrm>
+            <a:off x="548640" y="5486400"/>
+            <a:ext cx="11094415" cy="685800"/>
+          </a:xfrm>
+          <a:prstGeom prst="roundRect">
+            <a:avLst>
+              <a:gd name="adj" fmla="val 10667"/>
+            </a:avLst>
+          </a:prstGeom>
+          <a:solidFill>
+            <a:schemeClr val="bg2"/>
+          </a:solidFill>
+          <a:ln w="9525">
+            <a:solidFill>
+              <a:srgbClr val="C4CBD8"/>
+            </a:solidFill>
+            <a:prstDash val="solid"/>
+          </a:ln>
+        </p:spPr>
+      </p:sp>
+      <p:sp>
+        <p:nvSpPr>
+          <p:cNvPr id="29" name="Deliverable"/>
+          <p:cNvSpPr txBox="1"/>
+          <p:nvPr/>
+        </p:nvSpPr>
+        <p:spPr>
+          <a:xfrm>
+            <a:off x="777240" y="5559552"/>
+            <a:ext cx="10637215" cy="539496"/>
+          </a:xfrm>
+          <a:prstGeom prst="rect">
+            <a:avLst/>
+          </a:prstGeom>
+          <a:noFill/>
+          <a:ln/>
+        </p:spPr>
+        <p:txBody>
           <a:bodyPr wrap="square" lIns="0" tIns="0" rIns="0" bIns="0" rtlCol="0" anchor="ctr"/>
           <a:lstStyle/>
           <a:p>
@@ -16163,14 +16577,22 @@
               <a:buNone/>
             </a:pPr>
             <a:r>
-              <a:rPr lang="en-US" sz="1500" dirty="0">
+              <a:rPr lang="en-US" sz="1400" b="1" dirty="0">
                 <a:solidFill>
                   <a:schemeClr val="tx1"/>
                 </a:solidFill>
               </a:rPr>
-              <a:t>Part III's appetites are bounds on a cost–safety frontier, and their prices are its slopes (Proposition 12.3). For Meridian's program, the board's price of savings, $5.645 a dollar, decides between two, three, and four rounds.</a:t>
-            </a:r>
-            <a:endParaRPr lang="en-US" sz="1500" dirty="0"/>
+              <a:t>Deliverable:</a:t>
+            </a:r>
+            <a:r>
+              <a:rPr lang="en-US" sz="1400" dirty="0">
+                <a:solidFill>
+                  <a:schemeClr val="tx1"/>
+                </a:solidFill>
+              </a:rPr>
+              <a:t> a one-page note to the board: the efficient plans, the prices between them, the recommended plan with the prices or aspirations that select it, and what each owner gives up. About 75 minutes.</a:t>
+            </a:r>
+            <a:endParaRPr lang="en-US" sz="1400" dirty="0"/>
           </a:p>
         </p:txBody>
       </p:sp>
@@ -16276,7 +16698,7 @@
                   <a:schemeClr val="accent1"/>
                 </a:solidFill>
               </a:rPr>
-              <a:t>THIS WEEK'S LABORATORY</a:t>
+              <a:t>KEY TAKEAWAYS</a:t>
             </a:r>
             <a:endParaRPr lang="en-US" sz="1200" dirty="0"/>
           </a:p>
@@ -16317,7 +16739,7 @@
                 <a:ea typeface="Cambria" pitchFamily="34" charset="-122"/>
                 <a:cs typeface="Cambria" pitchFamily="34" charset="-120"/>
               </a:rPr>
-              <a:t>Notebook and workbook reproduce the book</a:t>
+              <a:t>What to carry forward</a:t>
             </a:r>
             <a:endParaRPr lang="en-US" sz="3200" dirty="0"/>
           </a:p>
@@ -16325,26 +16747,24 @@
       </p:sp>
       <p:sp>
         <p:nvSpPr>
-          <p:cNvPr id="5" name="Stat card"/>
+          <p:cNvPr id="5" name="Number"/>
           <p:cNvSpPr/>
           <p:nvPr/>
         </p:nvSpPr>
         <p:spPr>
           <a:xfrm>
-            <a:off x="548640" y="1691640"/>
-            <a:ext cx="2567864" cy="1691640"/>
-          </a:xfrm>
-          <a:prstGeom prst="roundRect">
-            <a:avLst>
-              <a:gd name="adj" fmla="val 4324"/>
-            </a:avLst>
+            <a:off x="548640" y="1737360"/>
+            <a:ext cx="566928" cy="566928"/>
+          </a:xfrm>
+          <a:prstGeom prst="ellipse">
+            <a:avLst/>
           </a:prstGeom>
           <a:solidFill>
-            <a:schemeClr val="tx1"/>
+            <a:schemeClr val="accent1"/>
           </a:solidFill>
-          <a:ln w="9525">
+          <a:ln w="6350">
             <a:solidFill>
-              <a:srgbClr val="0F1E3D"/>
+              <a:schemeClr val="accent1"/>
             </a:solidFill>
             <a:prstDash val="solid"/>
           </a:ln>
@@ -16352,14 +16772,14 @@
       </p:sp>
       <p:sp>
         <p:nvSpPr>
-          <p:cNvPr id="6" name="Stat value"/>
+          <p:cNvPr id="6" name="Text 3"/>
           <p:cNvSpPr txBox="1"/>
           <p:nvPr/>
         </p:nvSpPr>
         <p:spPr>
           <a:xfrm>
-            <a:off x="685800" y="1801368"/>
-            <a:ext cx="2293544" cy="914400"/>
+            <a:off x="548640" y="1737360"/>
+            <a:ext cx="566928" cy="566928"/>
           </a:xfrm>
           <a:prstGeom prst="rect">
             <a:avLst/>
@@ -16375,30 +16795,30 @@
               <a:buNone/>
             </a:pPr>
             <a:r>
-              <a:rPr lang="en-US" sz="4400" b="1" dirty="0">
-                <a:solidFill>
-                  <a:schemeClr val="accent1"/>
-                </a:solidFill>
-                <a:latin typeface="Cambria" pitchFamily="34" charset="0"/>
-                <a:ea typeface="Cambria" pitchFamily="34" charset="-122"/>
-                <a:cs typeface="Cambria" pitchFamily="34" charset="-120"/>
-              </a:rPr>
-              <a:t>260</a:t>
-            </a:r>
-            <a:endParaRPr lang="en-US" sz="4400" dirty="0"/>
-          </a:p>
-        </p:txBody>
-      </p:sp>
-      <p:sp>
-        <p:nvSpPr>
-          <p:cNvPr id="7" name="Stat label"/>
+              <a:rPr lang="en-US" sz="1500" b="1" dirty="0">
+                <a:solidFill>
+                  <a:schemeClr val="bg1"/>
+                </a:solidFill>
+                <a:latin typeface="Calibri" pitchFamily="34" charset="0"/>
+                <a:ea typeface="Calibri" pitchFamily="34" charset="-122"/>
+                <a:cs typeface="Calibri" pitchFamily="34" charset="-120"/>
+              </a:rPr>
+              <a:t>1</a:t>
+            </a:r>
+            <a:endParaRPr lang="en-US" sz="1500" dirty="0"/>
+          </a:p>
+        </p:txBody>
+      </p:sp>
+      <p:sp>
+        <p:nvSpPr>
+          <p:cNvPr id="7" name="Row text"/>
           <p:cNvSpPr txBox="1"/>
           <p:nvPr/>
         </p:nvSpPr>
         <p:spPr>
           <a:xfrm>
-            <a:off x="685800" y="2697480"/>
-            <a:ext cx="2293544" cy="612648"/>
+            <a:off x="1325880" y="1691640"/>
+            <a:ext cx="10317175" cy="841248"/>
           </a:xfrm>
           <a:prstGeom prst="rect">
             <a:avLst/>
@@ -16407,46 +16827,44 @@
           <a:ln/>
         </p:spPr>
         <p:txBody>
-          <a:bodyPr wrap="square" lIns="0" tIns="0" rIns="0" bIns="0" rtlCol="0" anchor="t"/>
-          <a:lstStyle/>
-          <a:p>
-            <a:pPr algn="ctr" indent="0" marL="0">
+          <a:bodyPr wrap="square" lIns="0" tIns="0" rIns="0" bIns="0" rtlCol="0" anchor="ctr"/>
+          <a:lstStyle/>
+          <a:p>
+            <a:pPr indent="0" marL="0">
               <a:buNone/>
             </a:pPr>
             <a:r>
-              <a:rPr lang="en-US" sz="1400" dirty="0">
-                <a:solidFill>
-                  <a:schemeClr val="bg2"/>
-                </a:solidFill>
-              </a:rPr>
-              <a:t>notebook checkpoints, every one PASS</a:t>
-            </a:r>
-            <a:endParaRPr lang="en-US" sz="1400" dirty="0"/>
-          </a:p>
-        </p:txBody>
-      </p:sp>
-      <p:sp>
-        <p:nvSpPr>
-          <p:cNvPr id="8" name="Stat card"/>
+              <a:rPr lang="en-US" sz="1500" dirty="0">
+                <a:solidFill>
+                  <a:schemeClr val="tx1"/>
+                </a:solidFill>
+              </a:rPr>
+              <a:t>A transformation program has several owners and several objectives. Compute the frontier first: efficient plans exist, dominated plans can be discarded, and bounds on all objectives but one trace the frontier exactly.</a:t>
+            </a:r>
+            <a:endParaRPr lang="en-US" sz="1500" dirty="0"/>
+          </a:p>
+        </p:txBody>
+      </p:sp>
+      <p:sp>
+        <p:nvSpPr>
+          <p:cNvPr id="8" name="Number"/>
           <p:cNvSpPr/>
           <p:nvPr/>
         </p:nvSpPr>
         <p:spPr>
           <a:xfrm>
-            <a:off x="3390824" y="1691640"/>
-            <a:ext cx="2567864" cy="1691640"/>
-          </a:xfrm>
-          <a:prstGeom prst="roundRect">
-            <a:avLst>
-              <a:gd name="adj" fmla="val 4324"/>
-            </a:avLst>
+            <a:off x="548640" y="2633472"/>
+            <a:ext cx="566928" cy="566928"/>
+          </a:xfrm>
+          <a:prstGeom prst="ellipse">
+            <a:avLst/>
           </a:prstGeom>
           <a:solidFill>
-            <a:schemeClr val="bg2"/>
+            <a:schemeClr val="accent1"/>
           </a:solidFill>
-          <a:ln w="9525">
+          <a:ln w="6350">
             <a:solidFill>
-              <a:srgbClr val="C4CBD8"/>
+              <a:schemeClr val="accent1"/>
             </a:solidFill>
             <a:prstDash val="solid"/>
           </a:ln>
@@ -16454,14 +16872,14 @@
       </p:sp>
       <p:sp>
         <p:nvSpPr>
-          <p:cNvPr id="9" name="Stat value"/>
+          <p:cNvPr id="9" name="Text 6"/>
           <p:cNvSpPr txBox="1"/>
           <p:nvPr/>
         </p:nvSpPr>
         <p:spPr>
           <a:xfrm>
-            <a:off x="3527984" y="1801368"/>
-            <a:ext cx="2293544" cy="914400"/>
+            <a:off x="548640" y="2633472"/>
+            <a:ext cx="566928" cy="566928"/>
           </a:xfrm>
           <a:prstGeom prst="rect">
             <a:avLst/>
@@ -16477,30 +16895,30 @@
               <a:buNone/>
             </a:pPr>
             <a:r>
-              <a:rPr lang="en-US" sz="4400" b="1" dirty="0">
-                <a:solidFill>
-                  <a:schemeClr val="tx1"/>
-                </a:solidFill>
-                <a:latin typeface="Cambria" pitchFamily="34" charset="0"/>
-                <a:ea typeface="Cambria" pitchFamily="34" charset="-122"/>
-                <a:cs typeface="Cambria" pitchFamily="34" charset="-120"/>
-              </a:rPr>
-              <a:t>206</a:t>
-            </a:r>
-            <a:endParaRPr lang="en-US" sz="4400" dirty="0"/>
-          </a:p>
-        </p:txBody>
-      </p:sp>
-      <p:sp>
-        <p:nvSpPr>
-          <p:cNvPr id="10" name="Stat label"/>
+              <a:rPr lang="en-US" sz="1500" b="1" dirty="0">
+                <a:solidFill>
+                  <a:schemeClr val="bg1"/>
+                </a:solidFill>
+                <a:latin typeface="Calibri" pitchFamily="34" charset="0"/>
+                <a:ea typeface="Calibri" pitchFamily="34" charset="-122"/>
+                <a:cs typeface="Calibri" pitchFamily="34" charset="-120"/>
+              </a:rPr>
+              <a:t>2</a:t>
+            </a:r>
+            <a:endParaRPr lang="en-US" sz="1500" dirty="0"/>
+          </a:p>
+        </p:txBody>
+      </p:sp>
+      <p:sp>
+        <p:nvSpPr>
+          <p:cNvPr id="10" name="Row text"/>
           <p:cNvSpPr txBox="1"/>
           <p:nvPr/>
         </p:nvSpPr>
         <p:spPr>
           <a:xfrm>
-            <a:off x="3527984" y="2697480"/>
-            <a:ext cx="2293544" cy="612648"/>
+            <a:off x="1325880" y="2587752"/>
+            <a:ext cx="10317175" cy="841248"/>
           </a:xfrm>
           <a:prstGeom prst="rect">
             <a:avLst/>
@@ -16509,46 +16927,44 @@
           <a:ln/>
         </p:spPr>
         <p:txBody>
-          <a:bodyPr wrap="square" lIns="0" tIns="0" rIns="0" bIns="0" rtlCol="0" anchor="t"/>
-          <a:lstStyle/>
-          <a:p>
-            <a:pPr algn="ctr" indent="0" marL="0">
+          <a:bodyPr wrap="square" lIns="0" tIns="0" rIns="0" bIns="0" rtlCol="0" anchor="ctr"/>
+          <a:lstStyle/>
+          <a:p>
+            <a:pPr indent="0" marL="0">
               <a:buNone/>
             </a:pPr>
             <a:r>
-              <a:rPr lang="en-US" sz="1400" dirty="0">
-                <a:solidFill>
-                  <a:schemeClr val="tx2"/>
-                </a:solidFill>
-              </a:rPr>
-              <a:t>workbook checks against the engine, ALL PASS</a:t>
-            </a:r>
-            <a:endParaRPr lang="en-US" sz="1400" dirty="0"/>
-          </a:p>
-        </p:txBody>
-      </p:sp>
-      <p:sp>
-        <p:nvSpPr>
-          <p:cNvPr id="11" name="Stat card"/>
+              <a:rPr lang="en-US" sz="1500" dirty="0">
+                <a:solidFill>
+                  <a:schemeClr val="tx1"/>
+                </a:solidFill>
+              </a:rPr>
+              <a:t>Weighted sums find efficient plans and reveal prices, but reach only the frontier's supported part; bounds' multipliers are the rates at which owners trade.</a:t>
+            </a:r>
+            <a:endParaRPr lang="en-US" sz="1500" dirty="0"/>
+          </a:p>
+        </p:txBody>
+      </p:sp>
+      <p:sp>
+        <p:nvSpPr>
+          <p:cNvPr id="11" name="Number"/>
           <p:cNvSpPr/>
           <p:nvPr/>
         </p:nvSpPr>
         <p:spPr>
           <a:xfrm>
-            <a:off x="6233008" y="1691640"/>
-            <a:ext cx="2567864" cy="1691640"/>
-          </a:xfrm>
-          <a:prstGeom prst="roundRect">
-            <a:avLst>
-              <a:gd name="adj" fmla="val 4324"/>
-            </a:avLst>
+            <a:off x="548640" y="3529584"/>
+            <a:ext cx="566928" cy="566928"/>
+          </a:xfrm>
+          <a:prstGeom prst="ellipse">
+            <a:avLst/>
           </a:prstGeom>
           <a:solidFill>
-            <a:schemeClr val="bg2"/>
+            <a:schemeClr val="accent1"/>
           </a:solidFill>
-          <a:ln w="9525">
+          <a:ln w="6350">
             <a:solidFill>
-              <a:srgbClr val="C4CBD8"/>
+              <a:schemeClr val="accent1"/>
             </a:solidFill>
             <a:prstDash val="solid"/>
           </a:ln>
@@ -16556,14 +16972,14 @@
       </p:sp>
       <p:sp>
         <p:nvSpPr>
-          <p:cNvPr id="12" name="Stat value"/>
+          <p:cNvPr id="12" name="Text 9"/>
           <p:cNvSpPr txBox="1"/>
           <p:nvPr/>
         </p:nvSpPr>
         <p:spPr>
           <a:xfrm>
-            <a:off x="6370168" y="1801368"/>
-            <a:ext cx="2293544" cy="914400"/>
+            <a:off x="548640" y="3529584"/>
+            <a:ext cx="566928" cy="566928"/>
           </a:xfrm>
           <a:prstGeom prst="rect">
             <a:avLst/>
@@ -16579,30 +16995,30 @@
               <a:buNone/>
             </a:pPr>
             <a:r>
-              <a:rPr lang="en-US" sz="4400" b="1" dirty="0">
-                <a:solidFill>
-                  <a:schemeClr val="tx1"/>
-                </a:solidFill>
-                <a:latin typeface="Cambria" pitchFamily="34" charset="0"/>
-                <a:ea typeface="Cambria" pitchFamily="34" charset="-122"/>
-                <a:cs typeface="Cambria" pitchFamily="34" charset="-120"/>
-              </a:rPr>
-              <a:t>26212</a:t>
-            </a:r>
-            <a:endParaRPr lang="en-US" sz="4400" dirty="0"/>
-          </a:p>
-        </p:txBody>
-      </p:sp>
-      <p:sp>
-        <p:nvSpPr>
-          <p:cNvPr id="13" name="Stat label"/>
+              <a:rPr lang="en-US" sz="1500" b="1" dirty="0">
+                <a:solidFill>
+                  <a:schemeClr val="bg1"/>
+                </a:solidFill>
+                <a:latin typeface="Calibri" pitchFamily="34" charset="0"/>
+                <a:ea typeface="Calibri" pitchFamily="34" charset="-122"/>
+                <a:cs typeface="Calibri" pitchFamily="34" charset="-120"/>
+              </a:rPr>
+              <a:t>3</a:t>
+            </a:r>
+            <a:endParaRPr lang="en-US" sz="1500" dirty="0"/>
+          </a:p>
+        </p:txBody>
+      </p:sp>
+      <p:sp>
+        <p:nvSpPr>
+          <p:cNvPr id="13" name="Row text"/>
           <p:cNvSpPr txBox="1"/>
           <p:nvPr/>
         </p:nvSpPr>
         <p:spPr>
           <a:xfrm>
-            <a:off x="6370168" y="2697480"/>
-            <a:ext cx="2293544" cy="612648"/>
+            <a:off x="1325880" y="3483864"/>
+            <a:ext cx="10317175" cy="841248"/>
           </a:xfrm>
           <a:prstGeom prst="rect">
             <a:avLst/>
@@ -16611,46 +17027,44 @@
           <a:ln/>
         </p:spPr>
         <p:txBody>
-          <a:bodyPr wrap="square" lIns="0" tIns="0" rIns="0" bIns="0" rtlCol="0" anchor="t"/>
-          <a:lstStyle/>
-          <a:p>
-            <a:pPr algn="ctr" indent="0" marL="0">
+          <a:bodyPr wrap="square" lIns="0" tIns="0" rIns="0" bIns="0" rtlCol="0" anchor="ctr"/>
+          <a:lstStyle/>
+          <a:p>
+            <a:pPr indent="0" marL="0">
               <a:buNone/>
             </a:pPr>
             <a:r>
-              <a:rPr lang="en-US" sz="1400" dirty="0">
-                <a:solidFill>
-                  <a:schemeClr val="tx2"/>
-                </a:solidFill>
-              </a:rPr>
-              <a:t>the lab's seed</a:t>
-            </a:r>
-            <a:endParaRPr lang="en-US" sz="1400" dirty="0"/>
-          </a:p>
-        </p:txBody>
-      </p:sp>
-      <p:sp>
-        <p:nvSpPr>
-          <p:cNvPr id="14" name="Stat card"/>
+              <a:rPr lang="en-US" sz="1500" dirty="0">
+                <a:solidFill>
+                  <a:schemeClr val="tx1"/>
+                </a:solidFill>
+              </a:rPr>
+              <a:t>Reference points reach every efficient plan, dents included; preferences strictly increasing in every objective choose efficient plans; goals need a second stage.</a:t>
+            </a:r>
+            <a:endParaRPr lang="en-US" sz="1500" dirty="0"/>
+          </a:p>
+        </p:txBody>
+      </p:sp>
+      <p:sp>
+        <p:nvSpPr>
+          <p:cNvPr id="14" name="Number"/>
           <p:cNvSpPr/>
           <p:nvPr/>
         </p:nvSpPr>
         <p:spPr>
           <a:xfrm>
-            <a:off x="9075191" y="1691640"/>
-            <a:ext cx="2567864" cy="1691640"/>
-          </a:xfrm>
-          <a:prstGeom prst="roundRect">
-            <a:avLst>
-              <a:gd name="adj" fmla="val 4324"/>
-            </a:avLst>
+            <a:off x="548640" y="4425696"/>
+            <a:ext cx="566928" cy="566928"/>
+          </a:xfrm>
+          <a:prstGeom prst="ellipse">
+            <a:avLst/>
           </a:prstGeom>
           <a:solidFill>
-            <a:schemeClr val="bg2"/>
+            <a:schemeClr val="accent1"/>
           </a:solidFill>
-          <a:ln w="9525">
+          <a:ln w="6350">
             <a:solidFill>
-              <a:srgbClr val="C4CBD8"/>
+              <a:schemeClr val="accent1"/>
             </a:solidFill>
             <a:prstDash val="solid"/>
           </a:ln>
@@ -16658,14 +17072,14 @@
       </p:sp>
       <p:sp>
         <p:nvSpPr>
-          <p:cNvPr id="15" name="Stat value"/>
+          <p:cNvPr id="15" name="Text 12"/>
           <p:cNvSpPr txBox="1"/>
           <p:nvPr/>
         </p:nvSpPr>
         <p:spPr>
           <a:xfrm>
-            <a:off x="9212351" y="1801368"/>
-            <a:ext cx="2293544" cy="914400"/>
+            <a:off x="548640" y="4425696"/>
+            <a:ext cx="566928" cy="566928"/>
           </a:xfrm>
           <a:prstGeom prst="rect">
             <a:avLst/>
@@ -16681,30 +17095,30 @@
               <a:buNone/>
             </a:pPr>
             <a:r>
-              <a:rPr lang="en-US" sz="3000" b="1" dirty="0">
-                <a:solidFill>
-                  <a:schemeClr val="tx1"/>
-                </a:solidFill>
-                <a:latin typeface="Cambria" pitchFamily="34" charset="0"/>
-                <a:ea typeface="Cambria" pitchFamily="34" charset="-122"/>
-                <a:cs typeface="Cambria" pitchFamily="34" charset="-120"/>
-              </a:rPr>
-              <a:t>AXIOM-12</a:t>
-            </a:r>
-            <a:endParaRPr lang="en-US" sz="3000" dirty="0"/>
-          </a:p>
-        </p:txBody>
-      </p:sp>
-      <p:sp>
-        <p:nvSpPr>
-          <p:cNvPr id="16" name="Stat label"/>
+              <a:rPr lang="en-US" sz="1500" b="1" dirty="0">
+                <a:solidFill>
+                  <a:schemeClr val="bg1"/>
+                </a:solidFill>
+                <a:latin typeface="Calibri" pitchFamily="34" charset="0"/>
+                <a:ea typeface="Calibri" pitchFamily="34" charset="-122"/>
+                <a:cs typeface="Calibri" pitchFamily="34" charset="-120"/>
+              </a:rPr>
+              <a:t>4</a:t>
+            </a:r>
+            <a:endParaRPr lang="en-US" sz="1500" dirty="0"/>
+          </a:p>
+        </p:txBody>
+      </p:sp>
+      <p:sp>
+        <p:nvSpPr>
+          <p:cNvPr id="16" name="Row text"/>
           <p:cNvSpPr txBox="1"/>
           <p:nvPr/>
         </p:nvSpPr>
         <p:spPr>
           <a:xfrm>
-            <a:off x="9212351" y="2697480"/>
-            <a:ext cx="2293544" cy="612648"/>
+            <a:off x="1325880" y="4379976"/>
+            <a:ext cx="10317175" cy="841248"/>
           </a:xfrm>
           <a:prstGeom prst="rect">
             <a:avLst/>
@@ -16713,34 +17127,98 @@
           <a:ln/>
         </p:spPr>
         <p:txBody>
-          <a:bodyPr wrap="square" lIns="0" tIns="0" rIns="0" bIns="0" rtlCol="0" anchor="t"/>
+          <a:bodyPr wrap="square" lIns="0" tIns="0" rIns="0" bIns="0" rtlCol="0" anchor="ctr"/>
+          <a:lstStyle/>
+          <a:p>
+            <a:pPr indent="0" marL="0">
+              <a:buNone/>
+            </a:pPr>
+            <a:r>
+              <a:rPr lang="en-US" sz="1500" dirty="0">
+                <a:solidFill>
+                  <a:schemeClr val="tx1"/>
+                </a:solidFill>
+              </a:rPr>
+              <a:t>Frontiers are bracketed by bounds, summarized by hypervolume, and approximated by evolutionary search, which is statistical, not certified.</a:t>
+            </a:r>
+            <a:endParaRPr lang="en-US" sz="1500" dirty="0"/>
+          </a:p>
+        </p:txBody>
+      </p:sp>
+      <p:sp>
+        <p:nvSpPr>
+          <p:cNvPr id="17" name="Number"/>
+          <p:cNvSpPr/>
+          <p:nvPr/>
+        </p:nvSpPr>
+        <p:spPr>
+          <a:xfrm>
+            <a:off x="548640" y="5321808"/>
+            <a:ext cx="566928" cy="566928"/>
+          </a:xfrm>
+          <a:prstGeom prst="ellipse">
+            <a:avLst/>
+          </a:prstGeom>
+          <a:solidFill>
+            <a:schemeClr val="accent1"/>
+          </a:solidFill>
+          <a:ln w="6350">
+            <a:solidFill>
+              <a:schemeClr val="accent1"/>
+            </a:solidFill>
+            <a:prstDash val="solid"/>
+          </a:ln>
+        </p:spPr>
+      </p:sp>
+      <p:sp>
+        <p:nvSpPr>
+          <p:cNvPr id="18" name="Text 15"/>
+          <p:cNvSpPr txBox="1"/>
+          <p:nvPr/>
+        </p:nvSpPr>
+        <p:spPr>
+          <a:xfrm>
+            <a:off x="548640" y="5321808"/>
+            <a:ext cx="566928" cy="566928"/>
+          </a:xfrm>
+          <a:prstGeom prst="rect">
+            <a:avLst/>
+          </a:prstGeom>
+          <a:noFill/>
+          <a:ln/>
+        </p:spPr>
+        <p:txBody>
+          <a:bodyPr wrap="square" lIns="0" tIns="0" rIns="0" bIns="0" rtlCol="0" anchor="ctr"/>
           <a:lstStyle/>
           <a:p>
             <a:pPr algn="ctr" indent="0" marL="0">
               <a:buNone/>
             </a:pPr>
             <a:r>
-              <a:rPr lang="en-US" sz="1400" dirty="0">
-                <a:solidFill>
-                  <a:schemeClr val="tx2"/>
-                </a:solidFill>
-              </a:rPr>
-              <a:t>AXIOM Lab 2.12</a:t>
-            </a:r>
-            <a:endParaRPr lang="en-US" sz="1400" dirty="0"/>
-          </a:p>
-        </p:txBody>
-      </p:sp>
-      <p:sp>
-        <p:nvSpPr>
-          <p:cNvPr id="17" name="Bullets"/>
+              <a:rPr lang="en-US" sz="1500" b="1" dirty="0">
+                <a:solidFill>
+                  <a:schemeClr val="bg1"/>
+                </a:solidFill>
+                <a:latin typeface="Calibri" pitchFamily="34" charset="0"/>
+                <a:ea typeface="Calibri" pitchFamily="34" charset="-122"/>
+                <a:cs typeface="Calibri" pitchFamily="34" charset="-120"/>
+              </a:rPr>
+              <a:t>5</a:t>
+            </a:r>
+            <a:endParaRPr lang="en-US" sz="1500" dirty="0"/>
+          </a:p>
+        </p:txBody>
+      </p:sp>
+      <p:sp>
+        <p:nvSpPr>
+          <p:cNvPr id="19" name="Row text"/>
           <p:cNvSpPr txBox="1"/>
           <p:nvPr/>
         </p:nvSpPr>
         <p:spPr>
           <a:xfrm>
-            <a:off x="548640" y="3703320"/>
-            <a:ext cx="11094415" cy="2468880"/>
+            <a:off x="1325880" y="5276088"/>
+            <a:ext cx="10317175" cy="841248"/>
           </a:xfrm>
           <a:prstGeom prst="rect">
             <a:avLst/>
@@ -16749,59 +17227,21 @@
           <a:ln/>
         </p:spPr>
         <p:txBody>
-          <a:bodyPr wrap="square" lIns="635" tIns="635" rIns="635" bIns="635" rtlCol="0" anchor="t"/>
-          <a:lstStyle/>
-          <a:p>
-            <a:pPr marL="228600" indent="-228600">
-              <a:spcAft>
-                <a:spcPts val="800"/>
-              </a:spcAft>
-              <a:buSzPct val="100000"/>
-              <a:buChar char="•"/>
-            </a:pPr>
-            <a:r>
-              <a:rPr lang="en-US" sz="1700" b="1" dirty="0">
+          <a:bodyPr wrap="square" lIns="0" tIns="0" rIns="0" bIns="0" rtlCol="0" anchor="ctr"/>
+          <a:lstStyle/>
+          <a:p>
+            <a:pPr indent="0" marL="0">
+              <a:buNone/>
+            </a:pPr>
+            <a:r>
+              <a:rPr lang="en-US" sz="1500" dirty="0">
                 <a:solidFill>
                   <a:schemeClr val="tx1"/>
                 </a:solidFill>
               </a:rPr>
-              <a:t>Notebook</a:t>
-            </a:r>
-            <a:r>
-              <a:rPr lang="en-US" sz="1700" dirty="0">
-                <a:solidFill>
-                  <a:schemeClr val="tx1"/>
-                </a:solidFill>
-              </a:rPr>
-              <a:t> DCT_V2_Ch12_Lab.ipynb: Worked Example 12.1 and the lab's five steps in seven panels, every payout program solved</a:t>
-            </a:r>
-            <a:endParaRPr lang="en-US" sz="1700" dirty="0"/>
-          </a:p>
-          <a:p>
-            <a:pPr marL="228600" indent="-228600">
-              <a:spcAft>
-                <a:spcPts val="800"/>
-              </a:spcAft>
-              <a:buSzPct val="100000"/>
-              <a:buChar char="•"/>
-            </a:pPr>
-            <a:r>
-              <a:rPr lang="en-US" sz="1700" b="1" dirty="0">
-                <a:solidFill>
-                  <a:schemeClr val="tx1"/>
-                </a:solidFill>
-              </a:rPr>
-              <a:t>Workbook</a:t>
-            </a:r>
-            <a:r>
-              <a:rPr lang="en-US" sz="1700" dirty="0">
-                <a:solidFill>
-                  <a:schemeClr val="tx1"/>
-                </a:solidFill>
-              </a:rPr>
-              <a:t> DCT_V2_Ch12_Lab.xlsx: the war chest raised by the reserve, the prices, every dent certified, the choices and Table 12.3, in formulas</a:t>
-            </a:r>
-            <a:endParaRPr lang="en-US" sz="1700" dirty="0"/>
+              <a:t>Part III's appetites are bounds on a cost–safety frontier, and their prices are its slopes (Proposition 12.3). For Meridian's program, the board's price of savings, $5.645 a dollar, decides between two, three, and four rounds.</a:t>
+            </a:r>
+            <a:endParaRPr lang="en-US" sz="1500" dirty="0"/>
           </a:p>
         </p:txBody>
       </p:sp>
@@ -16907,6 +17347,637 @@
                   <a:schemeClr val="accent1"/>
                 </a:solidFill>
               </a:rPr>
+              <a:t>THIS WEEK'S LABORATORY</a:t>
+            </a:r>
+            <a:endParaRPr lang="en-US" sz="1200" dirty="0"/>
+          </a:p>
+        </p:txBody>
+      </p:sp>
+      <p:sp>
+        <p:nvSpPr>
+          <p:cNvPr id="4" name="Text 1"/>
+          <p:cNvSpPr/>
+          <p:nvPr>
+            <p:ph idx="103" type="title" hasCustomPrompt="1"/>
+          </p:nvPr>
+        </p:nvSpPr>
+        <p:spPr>
+          <a:xfrm>
+            <a:off x="548640" y="658368"/>
+            <a:ext cx="11094415" cy="868680"/>
+          </a:xfrm>
+          <a:prstGeom prst="rect">
+            <a:avLst/>
+          </a:prstGeom>
+          <a:noFill/>
+          <a:ln/>
+        </p:spPr>
+        <p:txBody>
+          <a:bodyPr wrap="square" lIns="0" tIns="0" rIns="0" bIns="0" rtlCol="0" anchor="t"/>
+          <a:lstStyle/>
+          <a:p>
+            <a:pPr algn="l" indent="0" marL="0">
+              <a:buNone/>
+            </a:pPr>
+            <a:r>
+              <a:rPr lang="en-US" sz="3200" b="1" dirty="0">
+                <a:solidFill>
+                  <a:schemeClr val="tx1"/>
+                </a:solidFill>
+                <a:latin typeface="Cambria" pitchFamily="34" charset="0"/>
+                <a:ea typeface="Cambria" pitchFamily="34" charset="-122"/>
+                <a:cs typeface="Cambria" pitchFamily="34" charset="-120"/>
+              </a:rPr>
+              <a:t>Notebook and workbook reproduce the book</a:t>
+            </a:r>
+            <a:endParaRPr lang="en-US" sz="3200" dirty="0"/>
+          </a:p>
+        </p:txBody>
+      </p:sp>
+      <p:sp>
+        <p:nvSpPr>
+          <p:cNvPr id="5" name="Stat card"/>
+          <p:cNvSpPr/>
+          <p:nvPr/>
+        </p:nvSpPr>
+        <p:spPr>
+          <a:xfrm>
+            <a:off x="548640" y="1691640"/>
+            <a:ext cx="2567864" cy="1691640"/>
+          </a:xfrm>
+          <a:prstGeom prst="roundRect">
+            <a:avLst>
+              <a:gd name="adj" fmla="val 4324"/>
+            </a:avLst>
+          </a:prstGeom>
+          <a:solidFill>
+            <a:schemeClr val="tx1"/>
+          </a:solidFill>
+          <a:ln w="9525">
+            <a:solidFill>
+              <a:srgbClr val="0F1E3D"/>
+            </a:solidFill>
+            <a:prstDash val="solid"/>
+          </a:ln>
+        </p:spPr>
+      </p:sp>
+      <p:sp>
+        <p:nvSpPr>
+          <p:cNvPr id="6" name="Stat value"/>
+          <p:cNvSpPr txBox="1"/>
+          <p:nvPr/>
+        </p:nvSpPr>
+        <p:spPr>
+          <a:xfrm>
+            <a:off x="685800" y="1801368"/>
+            <a:ext cx="2293544" cy="914400"/>
+          </a:xfrm>
+          <a:prstGeom prst="rect">
+            <a:avLst/>
+          </a:prstGeom>
+          <a:noFill/>
+          <a:ln/>
+        </p:spPr>
+        <p:txBody>
+          <a:bodyPr wrap="square" lIns="0" tIns="0" rIns="0" bIns="0" rtlCol="0" anchor="ctr"/>
+          <a:lstStyle/>
+          <a:p>
+            <a:pPr algn="ctr" indent="0" marL="0">
+              <a:buNone/>
+            </a:pPr>
+            <a:r>
+              <a:rPr lang="en-US" sz="4400" b="1" dirty="0">
+                <a:solidFill>
+                  <a:schemeClr val="accent1"/>
+                </a:solidFill>
+                <a:latin typeface="Cambria" pitchFamily="34" charset="0"/>
+                <a:ea typeface="Cambria" pitchFamily="34" charset="-122"/>
+                <a:cs typeface="Cambria" pitchFamily="34" charset="-120"/>
+              </a:rPr>
+              <a:t>260</a:t>
+            </a:r>
+            <a:endParaRPr lang="en-US" sz="4400" dirty="0"/>
+          </a:p>
+        </p:txBody>
+      </p:sp>
+      <p:sp>
+        <p:nvSpPr>
+          <p:cNvPr id="7" name="Stat label"/>
+          <p:cNvSpPr txBox="1"/>
+          <p:nvPr/>
+        </p:nvSpPr>
+        <p:spPr>
+          <a:xfrm>
+            <a:off x="685800" y="2697480"/>
+            <a:ext cx="2293544" cy="612648"/>
+          </a:xfrm>
+          <a:prstGeom prst="rect">
+            <a:avLst/>
+          </a:prstGeom>
+          <a:noFill/>
+          <a:ln/>
+        </p:spPr>
+        <p:txBody>
+          <a:bodyPr wrap="square" lIns="0" tIns="0" rIns="0" bIns="0" rtlCol="0" anchor="t"/>
+          <a:lstStyle/>
+          <a:p>
+            <a:pPr algn="ctr" indent="0" marL="0">
+              <a:buNone/>
+            </a:pPr>
+            <a:r>
+              <a:rPr lang="en-US" sz="1400" dirty="0">
+                <a:solidFill>
+                  <a:schemeClr val="bg2"/>
+                </a:solidFill>
+              </a:rPr>
+              <a:t>notebook checkpoints, every one PASS</a:t>
+            </a:r>
+            <a:endParaRPr lang="en-US" sz="1400" dirty="0"/>
+          </a:p>
+        </p:txBody>
+      </p:sp>
+      <p:sp>
+        <p:nvSpPr>
+          <p:cNvPr id="8" name="Stat card"/>
+          <p:cNvSpPr/>
+          <p:nvPr/>
+        </p:nvSpPr>
+        <p:spPr>
+          <a:xfrm>
+            <a:off x="3390824" y="1691640"/>
+            <a:ext cx="2567864" cy="1691640"/>
+          </a:xfrm>
+          <a:prstGeom prst="roundRect">
+            <a:avLst>
+              <a:gd name="adj" fmla="val 4324"/>
+            </a:avLst>
+          </a:prstGeom>
+          <a:solidFill>
+            <a:schemeClr val="bg2"/>
+          </a:solidFill>
+          <a:ln w="9525">
+            <a:solidFill>
+              <a:srgbClr val="C4CBD8"/>
+            </a:solidFill>
+            <a:prstDash val="solid"/>
+          </a:ln>
+        </p:spPr>
+      </p:sp>
+      <p:sp>
+        <p:nvSpPr>
+          <p:cNvPr id="9" name="Stat value"/>
+          <p:cNvSpPr txBox="1"/>
+          <p:nvPr/>
+        </p:nvSpPr>
+        <p:spPr>
+          <a:xfrm>
+            <a:off x="3527984" y="1801368"/>
+            <a:ext cx="2293544" cy="914400"/>
+          </a:xfrm>
+          <a:prstGeom prst="rect">
+            <a:avLst/>
+          </a:prstGeom>
+          <a:noFill/>
+          <a:ln/>
+        </p:spPr>
+        <p:txBody>
+          <a:bodyPr wrap="square" lIns="0" tIns="0" rIns="0" bIns="0" rtlCol="0" anchor="ctr"/>
+          <a:lstStyle/>
+          <a:p>
+            <a:pPr algn="ctr" indent="0" marL="0">
+              <a:buNone/>
+            </a:pPr>
+            <a:r>
+              <a:rPr lang="en-US" sz="4400" b="1" dirty="0">
+                <a:solidFill>
+                  <a:schemeClr val="tx1"/>
+                </a:solidFill>
+                <a:latin typeface="Cambria" pitchFamily="34" charset="0"/>
+                <a:ea typeface="Cambria" pitchFamily="34" charset="-122"/>
+                <a:cs typeface="Cambria" pitchFamily="34" charset="-120"/>
+              </a:rPr>
+              <a:t>206</a:t>
+            </a:r>
+            <a:endParaRPr lang="en-US" sz="4400" dirty="0"/>
+          </a:p>
+        </p:txBody>
+      </p:sp>
+      <p:sp>
+        <p:nvSpPr>
+          <p:cNvPr id="10" name="Stat label"/>
+          <p:cNvSpPr txBox="1"/>
+          <p:nvPr/>
+        </p:nvSpPr>
+        <p:spPr>
+          <a:xfrm>
+            <a:off x="3527984" y="2697480"/>
+            <a:ext cx="2293544" cy="612648"/>
+          </a:xfrm>
+          <a:prstGeom prst="rect">
+            <a:avLst/>
+          </a:prstGeom>
+          <a:noFill/>
+          <a:ln/>
+        </p:spPr>
+        <p:txBody>
+          <a:bodyPr wrap="square" lIns="0" tIns="0" rIns="0" bIns="0" rtlCol="0" anchor="t"/>
+          <a:lstStyle/>
+          <a:p>
+            <a:pPr algn="ctr" indent="0" marL="0">
+              <a:buNone/>
+            </a:pPr>
+            <a:r>
+              <a:rPr lang="en-US" sz="1400" dirty="0">
+                <a:solidFill>
+                  <a:schemeClr val="tx2"/>
+                </a:solidFill>
+              </a:rPr>
+              <a:t>workbook checks against the engine, ALL PASS</a:t>
+            </a:r>
+            <a:endParaRPr lang="en-US" sz="1400" dirty="0"/>
+          </a:p>
+        </p:txBody>
+      </p:sp>
+      <p:sp>
+        <p:nvSpPr>
+          <p:cNvPr id="11" name="Stat card"/>
+          <p:cNvSpPr/>
+          <p:nvPr/>
+        </p:nvSpPr>
+        <p:spPr>
+          <a:xfrm>
+            <a:off x="6233008" y="1691640"/>
+            <a:ext cx="2567864" cy="1691640"/>
+          </a:xfrm>
+          <a:prstGeom prst="roundRect">
+            <a:avLst>
+              <a:gd name="adj" fmla="val 4324"/>
+            </a:avLst>
+          </a:prstGeom>
+          <a:solidFill>
+            <a:schemeClr val="bg2"/>
+          </a:solidFill>
+          <a:ln w="9525">
+            <a:solidFill>
+              <a:srgbClr val="C4CBD8"/>
+            </a:solidFill>
+            <a:prstDash val="solid"/>
+          </a:ln>
+        </p:spPr>
+      </p:sp>
+      <p:sp>
+        <p:nvSpPr>
+          <p:cNvPr id="12" name="Stat value"/>
+          <p:cNvSpPr txBox="1"/>
+          <p:nvPr/>
+        </p:nvSpPr>
+        <p:spPr>
+          <a:xfrm>
+            <a:off x="6370168" y="1801368"/>
+            <a:ext cx="2293544" cy="914400"/>
+          </a:xfrm>
+          <a:prstGeom prst="rect">
+            <a:avLst/>
+          </a:prstGeom>
+          <a:noFill/>
+          <a:ln/>
+        </p:spPr>
+        <p:txBody>
+          <a:bodyPr wrap="square" lIns="0" tIns="0" rIns="0" bIns="0" rtlCol="0" anchor="ctr"/>
+          <a:lstStyle/>
+          <a:p>
+            <a:pPr algn="ctr" indent="0" marL="0">
+              <a:buNone/>
+            </a:pPr>
+            <a:r>
+              <a:rPr lang="en-US" sz="4400" b="1" dirty="0">
+                <a:solidFill>
+                  <a:schemeClr val="tx1"/>
+                </a:solidFill>
+                <a:latin typeface="Cambria" pitchFamily="34" charset="0"/>
+                <a:ea typeface="Cambria" pitchFamily="34" charset="-122"/>
+                <a:cs typeface="Cambria" pitchFamily="34" charset="-120"/>
+              </a:rPr>
+              <a:t>26212</a:t>
+            </a:r>
+            <a:endParaRPr lang="en-US" sz="4400" dirty="0"/>
+          </a:p>
+        </p:txBody>
+      </p:sp>
+      <p:sp>
+        <p:nvSpPr>
+          <p:cNvPr id="13" name="Stat label"/>
+          <p:cNvSpPr txBox="1"/>
+          <p:nvPr/>
+        </p:nvSpPr>
+        <p:spPr>
+          <a:xfrm>
+            <a:off x="6370168" y="2697480"/>
+            <a:ext cx="2293544" cy="612648"/>
+          </a:xfrm>
+          <a:prstGeom prst="rect">
+            <a:avLst/>
+          </a:prstGeom>
+          <a:noFill/>
+          <a:ln/>
+        </p:spPr>
+        <p:txBody>
+          <a:bodyPr wrap="square" lIns="0" tIns="0" rIns="0" bIns="0" rtlCol="0" anchor="t"/>
+          <a:lstStyle/>
+          <a:p>
+            <a:pPr algn="ctr" indent="0" marL="0">
+              <a:buNone/>
+            </a:pPr>
+            <a:r>
+              <a:rPr lang="en-US" sz="1400" dirty="0">
+                <a:solidFill>
+                  <a:schemeClr val="tx2"/>
+                </a:solidFill>
+              </a:rPr>
+              <a:t>the lab's seed</a:t>
+            </a:r>
+            <a:endParaRPr lang="en-US" sz="1400" dirty="0"/>
+          </a:p>
+        </p:txBody>
+      </p:sp>
+      <p:sp>
+        <p:nvSpPr>
+          <p:cNvPr id="14" name="Stat card"/>
+          <p:cNvSpPr/>
+          <p:nvPr/>
+        </p:nvSpPr>
+        <p:spPr>
+          <a:xfrm>
+            <a:off x="9075191" y="1691640"/>
+            <a:ext cx="2567864" cy="1691640"/>
+          </a:xfrm>
+          <a:prstGeom prst="roundRect">
+            <a:avLst>
+              <a:gd name="adj" fmla="val 4324"/>
+            </a:avLst>
+          </a:prstGeom>
+          <a:solidFill>
+            <a:schemeClr val="bg2"/>
+          </a:solidFill>
+          <a:ln w="9525">
+            <a:solidFill>
+              <a:srgbClr val="C4CBD8"/>
+            </a:solidFill>
+            <a:prstDash val="solid"/>
+          </a:ln>
+        </p:spPr>
+      </p:sp>
+      <p:sp>
+        <p:nvSpPr>
+          <p:cNvPr id="15" name="Stat value"/>
+          <p:cNvSpPr txBox="1"/>
+          <p:nvPr/>
+        </p:nvSpPr>
+        <p:spPr>
+          <a:xfrm>
+            <a:off x="9212351" y="1801368"/>
+            <a:ext cx="2293544" cy="914400"/>
+          </a:xfrm>
+          <a:prstGeom prst="rect">
+            <a:avLst/>
+          </a:prstGeom>
+          <a:noFill/>
+          <a:ln/>
+        </p:spPr>
+        <p:txBody>
+          <a:bodyPr wrap="square" lIns="0" tIns="0" rIns="0" bIns="0" rtlCol="0" anchor="ctr"/>
+          <a:lstStyle/>
+          <a:p>
+            <a:pPr algn="ctr" indent="0" marL="0">
+              <a:buNone/>
+            </a:pPr>
+            <a:r>
+              <a:rPr lang="en-US" sz="3000" b="1" dirty="0">
+                <a:solidFill>
+                  <a:schemeClr val="tx1"/>
+                </a:solidFill>
+                <a:latin typeface="Cambria" pitchFamily="34" charset="0"/>
+                <a:ea typeface="Cambria" pitchFamily="34" charset="-122"/>
+                <a:cs typeface="Cambria" pitchFamily="34" charset="-120"/>
+              </a:rPr>
+              <a:t>AXIOM-12</a:t>
+            </a:r>
+            <a:endParaRPr lang="en-US" sz="3000" dirty="0"/>
+          </a:p>
+        </p:txBody>
+      </p:sp>
+      <p:sp>
+        <p:nvSpPr>
+          <p:cNvPr id="16" name="Stat label"/>
+          <p:cNvSpPr txBox="1"/>
+          <p:nvPr/>
+        </p:nvSpPr>
+        <p:spPr>
+          <a:xfrm>
+            <a:off x="9212351" y="2697480"/>
+            <a:ext cx="2293544" cy="612648"/>
+          </a:xfrm>
+          <a:prstGeom prst="rect">
+            <a:avLst/>
+          </a:prstGeom>
+          <a:noFill/>
+          <a:ln/>
+        </p:spPr>
+        <p:txBody>
+          <a:bodyPr wrap="square" lIns="0" tIns="0" rIns="0" bIns="0" rtlCol="0" anchor="t"/>
+          <a:lstStyle/>
+          <a:p>
+            <a:pPr algn="ctr" indent="0" marL="0">
+              <a:buNone/>
+            </a:pPr>
+            <a:r>
+              <a:rPr lang="en-US" sz="1400" dirty="0">
+                <a:solidFill>
+                  <a:schemeClr val="tx2"/>
+                </a:solidFill>
+              </a:rPr>
+              <a:t>AXIOM Lab 2.12</a:t>
+            </a:r>
+            <a:endParaRPr lang="en-US" sz="1400" dirty="0"/>
+          </a:p>
+        </p:txBody>
+      </p:sp>
+      <p:sp>
+        <p:nvSpPr>
+          <p:cNvPr id="17" name="Bullets"/>
+          <p:cNvSpPr txBox="1"/>
+          <p:nvPr/>
+        </p:nvSpPr>
+        <p:spPr>
+          <a:xfrm>
+            <a:off x="548640" y="3703320"/>
+            <a:ext cx="11094415" cy="2468880"/>
+          </a:xfrm>
+          <a:prstGeom prst="rect">
+            <a:avLst/>
+          </a:prstGeom>
+          <a:noFill/>
+          <a:ln/>
+        </p:spPr>
+        <p:txBody>
+          <a:bodyPr wrap="square" lIns="635" tIns="635" rIns="635" bIns="635" rtlCol="0" anchor="t"/>
+          <a:lstStyle/>
+          <a:p>
+            <a:pPr marL="228600" indent="-228600">
+              <a:spcAft>
+                <a:spcPts val="800"/>
+              </a:spcAft>
+              <a:buSzPct val="100000"/>
+              <a:buChar char="•"/>
+            </a:pPr>
+            <a:r>
+              <a:rPr lang="en-US" sz="1700" b="1" dirty="0">
+                <a:solidFill>
+                  <a:schemeClr val="tx1"/>
+                </a:solidFill>
+              </a:rPr>
+              <a:t>Notebook</a:t>
+            </a:r>
+            <a:r>
+              <a:rPr lang="en-US" sz="1700" dirty="0">
+                <a:solidFill>
+                  <a:schemeClr val="tx1"/>
+                </a:solidFill>
+              </a:rPr>
+              <a:t> DCT_V2_Ch12_Lab.ipynb: Worked Example 12.1 and the lab's five steps in seven panels, every payout program solved</a:t>
+            </a:r>
+            <a:endParaRPr lang="en-US" sz="1700" dirty="0"/>
+          </a:p>
+          <a:p>
+            <a:pPr marL="228600" indent="-228600">
+              <a:spcAft>
+                <a:spcPts val="800"/>
+              </a:spcAft>
+              <a:buSzPct val="100000"/>
+              <a:buChar char="•"/>
+            </a:pPr>
+            <a:r>
+              <a:rPr lang="en-US" sz="1700" b="1" dirty="0">
+                <a:solidFill>
+                  <a:schemeClr val="tx1"/>
+                </a:solidFill>
+              </a:rPr>
+              <a:t>Workbook</a:t>
+            </a:r>
+            <a:r>
+              <a:rPr lang="en-US" sz="1700" dirty="0">
+                <a:solidFill>
+                  <a:schemeClr val="tx1"/>
+                </a:solidFill>
+              </a:rPr>
+              <a:t> DCT_V2_Ch12_Lab.xlsx: the war chest raised by the reserve, the prices, every dent certified, the choices and Table 12.3, in formulas</a:t>
+            </a:r>
+            <a:endParaRPr lang="en-US" sz="1700" dirty="0"/>
+          </a:p>
+        </p:txBody>
+      </p:sp>
+      <p:sp>
+        <p:nvSpPr>
+          <p:cNvPr id="25" name="Slide Number Placeholder 0"/>
+          <p:cNvSpPr>
+            <a:spLocks noGrp="1"/>
+          </p:cNvSpPr>
+          <p:nvPr>
+            <p:ph type="sldNum" sz="quarter" idx="4294967295"/>
+          </p:nvPr>
+        </p:nvSpPr>
+        <p:spPr>
+          <a:xfrm>
+            <a:off x="11094415" y="6382512"/>
+            <a:ext cx="548640" cy="237744"/>
+          </a:xfrm>
+          <a:prstGeom prst="rect">
+            <a:avLst/>
+          </a:prstGeom>
+          <a:extLst>
+            <a:ext uri="{C572A759-6A51-4108-AA02-DFA0A04FC94B}">
+              <ma14:wrappingTextBoxFlag xmlns:ma14="http://schemas.microsoft.com/office/mac/drawingml/2011/main" val="0"/>
+            </a:ext>
+          </a:extLst>
+        </p:spPr>
+        <p:txBody>
+          <a:bodyPr/>
+          <a:lstStyle>
+            <a:lvl1pPr>
+              <a:defRPr sz="1000">
+                <a:solidFill>
+                  <a:srgbClr val="5A6B82"/>
+                </a:solidFill>
+              </a:defRPr>
+            </a:lvl1pPr>
+          </a:lstStyle>
+          <a:p>
+            <a:pPr algn="r"/>
+            <a:fld id="{F7021451-1387-4CA6-816F-3879F97B5CBC}" type="slidenum">
+              <a:rPr b="0" lang="en-US"/>
+              <a:t>23</a:t>
+            </a:fld>
+            <a:endParaRPr lang="en-US"/>
+          </a:p>
+        </p:txBody>
+      </p:sp>
+    </p:spTree>
+  </p:cSld>
+  <p:clrMapOvr>
+    <a:masterClrMapping/>
+  </p:clrMapOvr>
+</p:sld>
+</file>
+
+<file path=ppt/slides/slide24.xml><?xml version="1.0" encoding="utf-8"?>
+<p:sld xmlns:a="http://schemas.openxmlformats.org/drawingml/2006/main" xmlns:r="http://schemas.openxmlformats.org/officeDocument/2006/relationships" xmlns:p="http://schemas.openxmlformats.org/presentationml/2006/main">
+  <p:cSld name="Slide 24">
+    <p:spTree>
+      <p:nvGrpSpPr>
+        <p:cNvPr id="1" name=""/>
+        <p:cNvGrpSpPr/>
+        <p:nvPr/>
+      </p:nvGrpSpPr>
+      <p:grpSpPr>
+        <a:xfrm>
+          <a:off x="0" y="0"/>
+          <a:ext cx="0" cy="0"/>
+          <a:chOff x="0" y="0"/>
+          <a:chExt cx="0" cy="0"/>
+        </a:xfrm>
+      </p:grpSpPr>
+      <p:sp>
+        <p:nvSpPr>
+          <p:cNvPr id="3" name="Text 1"/>
+          <p:cNvSpPr/>
+          <p:nvPr>
+            <p:ph idx="102" type="body" hasCustomPrompt="1"/>
+          </p:nvPr>
+        </p:nvSpPr>
+        <p:spPr>
+          <a:xfrm>
+            <a:off x="548640" y="347472"/>
+            <a:ext cx="11094415" cy="292608"/>
+          </a:xfrm>
+          <a:prstGeom prst="rect">
+            <a:avLst/>
+          </a:prstGeom>
+          <a:noFill/>
+          <a:ln/>
+        </p:spPr>
+        <p:txBody>
+          <a:bodyPr wrap="square" lIns="0" tIns="0" rIns="0" bIns="0" rtlCol="0"/>
+          <a:lstStyle/>
+          <a:p>
+            <a:pPr indent="0" marL="0">
+              <a:buNone/>
+            </a:pPr>
+            <a:r>
+              <a:rPr lang="en-US" sz="1200" b="1" spc="200" kern="0" dirty="0">
+                <a:solidFill>
+                  <a:schemeClr val="accent1"/>
+                </a:solidFill>
+              </a:rPr>
               <a:t>NEXT · CHAPTER 13</a:t>
             </a:r>
             <a:endParaRPr lang="en-US" sz="1200" dirty="0"/>
@@ -17093,7 +18164,7 @@
             <a:pPr algn="r"/>
             <a:fld id="{F7021451-1387-4CA6-816F-3879F97B5CBC}" type="slidenum">
               <a:rPr b="0" lang="en-US"/>
-              <a:t>23</a:t>
+              <a:t>24</a:t>
             </a:fld>
             <a:endParaRPr lang="en-US"/>
           </a:p>
@@ -17846,7 +18917,7 @@
                 <a:ea typeface="Cambria" pitchFamily="34" charset="-122"/>
                 <a:cs typeface="Cambria" pitchFamily="34" charset="-120"/>
               </a:rPr>
-              <a:t>Five sections, a worked example and a lab</a:t>
+              <a:t>Five sections, a worked example, a case and a lab</a:t>
             </a:r>
             <a:endParaRPr lang="en-US" sz="3200" dirty="0"/>
           </a:p>
@@ -18737,7 +19808,7 @@
                   <a:schemeClr val="accent1"/>
                 </a:solidFill>
               </a:rPr>
-              <a:t>AXIOM Lab 2.12</a:t>
+              <a:t>In Practice</a:t>
             </a:r>
             <a:endParaRPr lang="en-US" sz="1300" dirty="0"/>
           </a:p>
@@ -18776,7 +19847,7 @@
                 <a:ea typeface="Cambria" pitchFamily="34" charset="-122"/>
                 <a:cs typeface="Cambria" pitchFamily="34" charset="-120"/>
               </a:rPr>
-              <a:t>Frontier First: Payouts, Savings, and the Reserve</a:t>
+              <a:t>Dutch Railways Weigh More Trains Against Punctuality</a:t>
             </a:r>
             <a:endParaRPr lang="en-US" sz="1500" dirty="0"/>
           </a:p>
@@ -18791,6 +19862,144 @@
         <p:spPr>
           <a:xfrm>
             <a:off x="6415888" y="5660136"/>
+            <a:ext cx="2202104" cy="384048"/>
+          </a:xfrm>
+          <a:prstGeom prst="rect">
+            <a:avLst/>
+          </a:prstGeom>
+          <a:noFill/>
+          <a:ln/>
+        </p:spPr>
+        <p:txBody>
+          <a:bodyPr wrap="square" lIns="0" tIns="0" rIns="0" bIns="0" rtlCol="0" anchor="t"/>
+          <a:lstStyle/>
+          <a:p>
+            <a:pPr indent="0" marL="0">
+              <a:buNone/>
+            </a:pPr>
+            <a:r>
+              <a:rPr lang="en-US" sz="1300" dirty="0">
+                <a:solidFill>
+                  <a:schemeClr val="tx2"/>
+                </a:solidFill>
+              </a:rPr>
+              <a:t>At a Glance · board questions</a:t>
+            </a:r>
+            <a:endParaRPr lang="en-US" sz="1300" dirty="0"/>
+          </a:p>
+        </p:txBody>
+      </p:sp>
+      <p:sp>
+        <p:nvSpPr>
+          <p:cNvPr id="33" name="Card"/>
+          <p:cNvSpPr/>
+          <p:nvPr/>
+        </p:nvSpPr>
+        <p:spPr>
+          <a:xfrm>
+            <a:off x="9075191" y="4069080"/>
+            <a:ext cx="2567864" cy="2103120"/>
+          </a:xfrm>
+          <a:prstGeom prst="roundRect">
+            <a:avLst>
+              <a:gd name="adj" fmla="val 3478"/>
+            </a:avLst>
+          </a:prstGeom>
+          <a:solidFill>
+            <a:schemeClr val="bg2"/>
+          </a:solidFill>
+          <a:ln w="9525">
+            <a:solidFill>
+              <a:srgbClr val="C4CBD8"/>
+            </a:solidFill>
+            <a:prstDash val="solid"/>
+          </a:ln>
+        </p:spPr>
+      </p:sp>
+      <p:sp>
+        <p:nvSpPr>
+          <p:cNvPr id="34" name="Card label"/>
+          <p:cNvSpPr txBox="1"/>
+          <p:nvPr/>
+        </p:nvSpPr>
+        <p:spPr>
+          <a:xfrm>
+            <a:off x="9258071" y="4197096"/>
+            <a:ext cx="2202104" cy="310896"/>
+          </a:xfrm>
+          <a:prstGeom prst="rect">
+            <a:avLst/>
+          </a:prstGeom>
+          <a:noFill/>
+          <a:ln/>
+        </p:spPr>
+        <p:txBody>
+          <a:bodyPr wrap="square" lIns="0" tIns="0" rIns="0" bIns="0" rtlCol="0" anchor="ctr"/>
+          <a:lstStyle/>
+          <a:p>
+            <a:pPr indent="0" marL="0">
+              <a:buNone/>
+            </a:pPr>
+            <a:r>
+              <a:rPr lang="en-US" sz="1300" b="1" dirty="0">
+                <a:solidFill>
+                  <a:schemeClr val="accent1"/>
+                </a:solidFill>
+              </a:rPr>
+              <a:t>AXIOM Lab 2.12</a:t>
+            </a:r>
+            <a:endParaRPr lang="en-US" sz="1300" dirty="0"/>
+          </a:p>
+        </p:txBody>
+      </p:sp>
+      <p:sp>
+        <p:nvSpPr>
+          <p:cNvPr id="35" name="Card head"/>
+          <p:cNvSpPr txBox="1"/>
+          <p:nvPr/>
+        </p:nvSpPr>
+        <p:spPr>
+          <a:xfrm>
+            <a:off x="9258071" y="4526280"/>
+            <a:ext cx="2202104" cy="1060704"/>
+          </a:xfrm>
+          <a:prstGeom prst="rect">
+            <a:avLst/>
+          </a:prstGeom>
+          <a:noFill/>
+          <a:ln/>
+        </p:spPr>
+        <p:txBody>
+          <a:bodyPr wrap="square" lIns="0" tIns="0" rIns="0" bIns="0" rtlCol="0" anchor="t"/>
+          <a:lstStyle/>
+          <a:p>
+            <a:pPr indent="0" marL="0">
+              <a:buNone/>
+            </a:pPr>
+            <a:r>
+              <a:rPr lang="en-US" sz="1500" b="1" dirty="0">
+                <a:solidFill>
+                  <a:schemeClr val="tx1"/>
+                </a:solidFill>
+                <a:latin typeface="Cambria" pitchFamily="34" charset="0"/>
+                <a:ea typeface="Cambria" pitchFamily="34" charset="-122"/>
+                <a:cs typeface="Cambria" pitchFamily="34" charset="-120"/>
+              </a:rPr>
+              <a:t>Frontier First: Payouts, Savings, and the Reserve</a:t>
+            </a:r>
+            <a:endParaRPr lang="en-US" sz="1500" dirty="0"/>
+          </a:p>
+        </p:txBody>
+      </p:sp>
+      <p:sp>
+        <p:nvSpPr>
+          <p:cNvPr id="36" name="Card text"/>
+          <p:cNvSpPr txBox="1"/>
+          <p:nvPr/>
+        </p:nvSpPr>
+        <p:spPr>
+          <a:xfrm>
+            <a:off x="9258071" y="5660136"/>
             <a:ext cx="2202104" cy="384048"/>
           </a:xfrm>
           <a:prstGeom prst="rect">
